--- a/pipeline/3pipepine/Deployment_Pipelines_Review.pptx
+++ b/pipeline/3pipepine/Deployment_Pipelines_Review.pptx
@@ -119,39 +119,39 @@
   <p:extLst>
     <p:ext uri="{521415D9-36F7-43E2-AB2F-B90AF26B5E84}">
       <p14:sectionLst xmlns:p14="http://schemas.microsoft.com/office/powerpoint/2010/main">
-        <p14:section name="Introduction" id="{76593f54-46d3-72ba-a0db-f04e7eeab718}">
+        <p14:section name="Introduction" id="{675c39a7-9f68-0df8-2bad-af7df07999af}">
           <p14:sldIdLst>
             <p14:sldId id="256"/>
             <p14:sldId id="257"/>
           </p14:sldIdLst>
         </p14:section>
-        <p14:section name="New pipeline" id="{671e58a3-2842-5e01-940b-05a47c9a148b}">
+        <p14:section name="New pipeline" id="{a6cf8a5d-3b5f-cdfd-d15f-0f34e1644ac5}">
           <p14:sldIdLst>
             <p14:sldId id="258"/>
             <p14:sldId id="259"/>
             <p14:sldId id="260"/>
           </p14:sldIdLst>
         </p14:section>
-        <p14:section name="WS2 DNS pipelines" id="{105945fb-3596-b6f8-20a3-d3821cbaf765}">
+        <p14:section name="WS2 DNS pipelines" id="{4f99652a-fa87-18bc-01ab-007fb532a797}">
           <p14:sldIdLst>
             <p14:sldId id="261"/>
             <p14:sldId id="262"/>
           </p14:sldIdLst>
         </p14:section>
-        <p14:section name="Comparison" id="{e325bbb1-ee5f-1432-50f1-6902a32ad8b6}">
+        <p14:section name="Comparison" id="{05a8ea22-50f7-83e2-9b26-d3848e83e385}">
           <p14:sldIdLst>
             <p14:sldId id="263"/>
             <p14:sldId id="264"/>
             <p14:sldId id="265"/>
           </p14:sldIdLst>
         </p14:section>
-        <p14:section name="Old pipeline" id="{ba1c318e-ade5-4576-57a7-ed764dfb6831}">
+        <p14:section name="Old pipeline" id="{81e38d76-46a9-3f2a-a536-67ee5a4ddc1c}">
           <p14:sldIdLst>
             <p14:sldId id="266"/>
             <p14:sldId id="267"/>
           </p14:sldIdLst>
         </p14:section>
-        <p14:section name="Recommendation" id="{0ca03216-8140-de1e-a975-8029b01e06e3}">
+        <p14:section name="Recommendation" id="{5a7050c8-ffd0-ae53-ad2e-00ed07913430}">
           <p14:sldIdLst>
             <p14:sldId id="268"/>
           </p14:sldIdLst>
@@ -648,7 +648,7 @@
           <a:p>
             <a:r>
               <a:rPr lang="en-US" dirty="0"/>
-              <a:t>Show the two files side by side, ideally for the same zone. Left: WS2’s export, a JSON file written by pipeline/dns_records_export.py into config/accounts/&lt;account&gt;/networking/dns-records-&lt;zone&gt;.json. It lists ordinary records only; the export run’s own summary (“Record Export Behavior”) says SOA, the zone’s own NS records and alias records are skipped, and the hosted zone itself is not in the file. Right: the zone’s CloudFormation template — the AWS::Route53::HostedZone resource plus every record as its own AWS::Route53::RecordSet, alias records included. If asked about SOA and NS: Route 53 creates them with the zone, which is why they come with the zone resource rather than being listed as records.</a:t>
+              <a:t>Left: a WS2 export — a JSON file written by pipeline/dns_records_export.py into config/accounts/&lt;account&gt;/networking/. It holds the zone’s ID and a list of record slots; the export run’s own summary (“Record Export Behavior”) says SOA, the zone’s own NS records and alias records are skipped, and the hosted zone itself is not defined in the file. Right: one of our CloudFormation templates — the AWS::Route53::HostedZone resource with its settings and tags, then each record as its own AWS::Route53::RecordSet, including an alias record pointing at CloudFront. The two screenshots are different zones; the structure is what matters. If asked about SOA and NS: Route 53 creates them with the zone, which is why they come with the zone resource rather than being listed as records.</a:t>
             </a:r>
             <a:endParaRPr lang="en-US" dirty="0"/>
           </a:p>
@@ -736,7 +736,7 @@
           <a:p>
             <a:r>
               <a:rPr lang="en-US" dirty="0"/>
-              <a:t>The old pipeline is simple and works for every resource type, but it deploys straight away: no drift check, no preview and no pause for approval. For small templates it uses “cloudformation deploy”, which creates and executes a change set in one go, so nobody gets to review it.</a:t>
+              <a:t>The old pipeline is simple and works for every resource type, but it deploys straight away: no drift check, no preview and no pause for approval. For small templates it uses “cloudformation deploy”, which creates and executes a change set in one go, so nobody gets to review it. The screenshot is a run of the earlier version of our CloudFormation pipeline, which deployed the same way; old-pipeline-firewall.yml runs look the same — one deploy job.</a:t>
             </a:r>
             <a:endParaRPr lang="en-US" dirty="0"/>
           </a:p>
@@ -912,7 +912,7 @@
           <a:p>
             <a:r>
               <a:rPr lang="en-US" dirty="0"/>
-              <a:t>Ask for three decisions. If DNS is the sticking point, agree points 1 and 2 today and trial DNS on the new pipeline with one zone. If WS2 stays in use for now, the quickest win is to add its missing approval job before the next production apply.</a:t>
+              <a:t>Ask for three decisions. If DNS is the sticking point, agree points 1 and 2 today and trial DNS on the new pipeline with one zone.</a:t>
             </a:r>
             <a:endParaRPr lang="en-US" dirty="0"/>
           </a:p>
@@ -1264,7 +1264,7 @@
           <a:p>
             <a:r>
               <a:rPr lang="en-US" dirty="0"/>
-              <a:t>How to capture (click inside a frame, then Ctrl+V): 1) GitHub › Actions › “CloudFormation Stack using S3 as required” › a sandbox run › the job graph. 2) In sandbox, change a tag by hand on a resource in a stack, then run the pipeline on that stack — it stops at Drift check; crop the drift table and the expected / actual lines from the run Summary, then undo the edit. 3) Any run with a real change and Deploy = no — crop “Change set ready for review” from the Summary. 4) Click the console link in that Summary — crop the change set page with the “Execute change set” button.</a:t>
+              <a:t>Four real runs. 1) The run page: Prepare, Drift check and Change set passed; Deploy is grey because Deploy = no, so nothing went live until someone executed the change set. 2) A drift check that found a difference: the run stopped before creating a change set and listed what differs. 3) A change set ready for review: one resource to modify, with the link to review and execute it in the AWS console. 4) A run with Deploy = yes: the pipeline executed that same change set and reported CREATE_COMPLETE.</a:t>
             </a:r>
             <a:endParaRPr lang="en-US" dirty="0"/>
           </a:p>
@@ -1352,7 +1352,7 @@
           <a:p>
             <a:r>
               <a:rPr lang="en-US" dirty="0"/>
-              <a:t>Credit where it is due: WS2 is a well-built tool for bulk DNS record edits. Export copies the live records into files and opens a Pull Request; Apply previews the differences and then applies them. The key gap: the Apply workflow is named “Gated / Audited” and its header says gatekeeper approval is required outside sandbox, but the approval job itself was never added — so with ‘execute’ ticked, changes go live straight after the preview, production included. Note the contrast: the read-only Export has an approval step for all-zone exports, while Apply, which changes live DNS, has none.</a:t>
+              <a:t>Credit where it is due: WS2 is a well-built tool for bulk DNS record edits. Export copies the live records into files and opens a Pull Request; Apply previews the differences, waits for a gatekeeper’s approval outside sandbox, and then applies them. The red boxes show what it does not do compared with the new pipeline: no alarm for changes made by hand, a preview that isn’t locked in (apply works the changes out again), and it works outside CloudFormation.</a:t>
             </a:r>
             <a:endParaRPr lang="en-US" dirty="0"/>
           </a:p>
@@ -1440,7 +1440,7 @@
           <a:p>
             <a:r>
               <a:rPr lang="en-US" dirty="0"/>
-              <a:t>The strengths are real: bulk edits, Pull Request review, deletes off by default. The biggest gap is governance: the header of ws2-dns-records-apply.yml says gatekeeper approval is required for non-sandbox accounts, but lines 418–444 show only the heading of the gate-approval job — no job under it — and the apply job needs only validate-account and preview. So anyone who ticks ‘execute’ changes live DNS straight away, production included. The other gaps: DNS records only (the export itself says to use CloudFormation for alias records), no manual-change alarm, and it works outside CloudFormation.</a:t>
+              <a:t>The strengths are real: bulk edits, Pull Request review, a preview with deletes off by default, and a gatekeeper approval before changes outside sandbox. The gaps compared with the new pipeline: DNS records only (the export itself says to use CloudFormation for alias records), no alarm for changes made by hand, a preview that isn’t locked in (apply works the changes out again after approval), and it works outside CloudFormation.</a:t>
             </a:r>
             <a:endParaRPr lang="en-US" dirty="0"/>
           </a:p>
@@ -1528,7 +1528,7 @@
           <a:p>
             <a:r>
               <a:rPr lang="en-US" dirty="0"/>
-              <a:t>The asterisk matters: AWS cannot drift-check every resource type, and FMS policies and individual DNS records are the ones that affect us. For DNS, the gains are the locked, reviewed change set, a real pause for approval (WS2’s approval job is missing), full coverage including alias records, and a proper history to roll back from (next slide). If asked: the new pipeline’s pause is its default (Deploy = no) — keep that default for production.</a:t>
+              <a:t>The asterisk matters: AWS cannot drift-check every resource type, and FMS policies and individual DNS records are the ones that affect us. For DNS, the gains are the locked, reviewed change set, full coverage including alias records, and a proper history to roll back from (next slide). Both pipelines pause for a person before go-live: WS2 with a gatekeeper approval outside sandbox, the new pipeline by default (Deploy = no) — keep that default for production.</a:t>
             </a:r>
             <a:endParaRPr lang="en-US" dirty="0"/>
           </a:p>
@@ -1616,7 +1616,7 @@
           <a:p>
             <a:r>
               <a:rPr lang="en-US" dirty="0"/>
-              <a:t>WS2’s export calls itself a backup (“periodic backup”, “back up everything”), but it is a snapshot: it runs only when someone triggers it, lands on a side branch or a download kept for 30 days, and skips alias records. With the new pipeline, the record templates in Git are the real thing that gets deployed, so in a production DNS issue we can see exactly what changed, when and who approved it — and undo it by reverting the commit, checking the change set and executing it. Be clear about one limit: Git only sees changes made through the pipeline; edits made by hand in the console never reach it, and AWS cannot drift-check individual records — one more reason to make the pipeline the only way DNS is changed. Screenshot: GitHub › the DNS record template file › History (or a merged Pull Request › Files changed).</a:t>
+              <a:t>WS2’s export calls itself a backup (“periodic backup”, “back up everything”), but it is a snapshot: it runs only when someone triggers it, lands on a side branch or a download kept for 30 days, and skips alias records. With the new pipeline, the record templates in Git are the real thing that gets deployed, so in a production DNS issue we can see exactly what changed, when and who approved it — and undo it by reverting the commit, checking the change set and executing it. The screenshot shows the Git history of one zone’s template, with the Pull Request behind each change. Be clear about one limit: Git only sees changes made through the pipeline; edits made by hand in the console never reach it, and AWS cannot drift-check individual records — one more reason to make the pipeline the only way DNS is changed.</a:t>
             </a:r>
             <a:endParaRPr lang="en-US" dirty="0"/>
           </a:p>
@@ -1688,197 +1688,6 @@
 </p:sldLayout>
 </file>
 
-<file path=ppt/slideLayouts/slideLayout10.xml><?xml version="1.0" encoding="utf-8"?>
-<p:sldLayout xmlns:a="http://schemas.openxmlformats.org/drawingml/2006/main" xmlns:r="http://schemas.openxmlformats.org/officeDocument/2006/relationships" xmlns:p="http://schemas.openxmlformats.org/presentationml/2006/main" preserve="1">
-  <p:cSld name="Closing (dark)">
-    <p:bg>
-      <p:bgPr>
-        <a:solidFill>
-          <a:schemeClr val="tx1"/>
-        </a:solidFill>
-      </p:bgPr>
-    </p:bg>
-    <p:spTree>
-      <p:nvGrpSpPr>
-        <p:cNvPr id="1" name=""/>
-        <p:cNvGrpSpPr/>
-        <p:nvPr/>
-      </p:nvGrpSpPr>
-      <p:grpSpPr>
-        <a:xfrm>
-          <a:off x="0" y="0"/>
-          <a:ext cx="0" cy="0"/>
-          <a:chOff x="0" y="0"/>
-          <a:chExt cx="0" cy="0"/>
-        </a:xfrm>
-      </p:grpSpPr>
-      <p:sp>
-        <p:nvSpPr>
-          <p:cNvPr id="2" name="Text 0"/>
-          <p:cNvSpPr/>
-          <p:nvPr>
-            <p:ph idx="100" type="title" hasCustomPrompt="1"/>
-          </p:nvPr>
-        </p:nvSpPr>
-        <p:spPr>
-          <a:xfrm>
-            <a:off x="548640" y="384048"/>
-            <a:ext cx="9144000" cy="713232"/>
-          </a:xfrm>
-          <a:prstGeom prst="rect">
-            <a:avLst/>
-          </a:prstGeom>
-          <a:noFill/>
-          <a:ln/>
-        </p:spPr>
-        <p:txBody>
-          <a:bodyPr wrap="square" rtlCol="0"/>
-          <a:lstStyle>
-            <a:lvl1pPr algn="l" indent="0" marL="0">
-              <a:buNone/>
-              <a:defRPr lang="en-US" sz="3400" b="1" dirty="0">
-                <a:solidFill>
-                  <a:schemeClr val="bg1"/>
-                </a:solidFill>
-              </a:defRPr>
-            </a:lvl1pPr>
-          </a:lstStyle>
-          <a:p>
-            <a:pPr algn="l" indent="0" marL="0">
-              <a:buNone/>
-            </a:pPr>
-            <a:endParaRPr lang="en-US" sz="3400" dirty="0"/>
-          </a:p>
-        </p:txBody>
-      </p:sp>
-      <p:sp>
-        <p:nvSpPr>
-          <p:cNvPr id="3" name="Text 0"/>
-          <p:cNvSpPr/>
-          <p:nvPr>
-            <p:ph idx="101" type="body" hasCustomPrompt="1"/>
-          </p:nvPr>
-        </p:nvSpPr>
-        <p:spPr>
-          <a:xfrm>
-            <a:off x="548640" y="1097280"/>
-            <a:ext cx="11091672" cy="384048"/>
-          </a:xfrm>
-          <a:prstGeom prst="rect">
-            <a:avLst/>
-          </a:prstGeom>
-          <a:noFill/>
-          <a:ln/>
-        </p:spPr>
-        <p:txBody>
-          <a:bodyPr wrap="square" rtlCol="0"/>
-          <a:lstStyle>
-            <a:lvl1pPr indent="0" marL="0">
-              <a:buNone/>
-              <a:defRPr lang="en-US" sz="1500" dirty="0">
-                <a:solidFill>
-                  <a:schemeClr val="accent6"/>
-                </a:solidFill>
-              </a:defRPr>
-            </a:lvl1pPr>
-          </a:lstStyle>
-          <a:p>
-            <a:pPr indent="0" marL="0">
-              <a:buNone/>
-            </a:pPr>
-            <a:endParaRPr lang="en-US" sz="1500" dirty="0"/>
-          </a:p>
-        </p:txBody>
-      </p:sp>
-      <p:sp>
-        <p:nvSpPr>
-          <p:cNvPr id="4" name="Text 0"/>
-          <p:cNvSpPr/>
-          <p:nvPr/>
-        </p:nvSpPr>
-        <p:spPr>
-          <a:xfrm>
-            <a:off x="548640" y="6473952"/>
-            <a:ext cx="6400800" cy="274320"/>
-          </a:xfrm>
-          <a:prstGeom prst="rect">
-            <a:avLst/>
-          </a:prstGeom>
-          <a:noFill/>
-          <a:ln/>
-        </p:spPr>
-        <p:txBody>
-          <a:bodyPr wrap="square" lIns="0" tIns="0" rIns="0" bIns="0" rtlCol="0" anchor="t"/>
-          <a:lstStyle/>
-          <a:p>
-            <a:pPr indent="0" marL="0">
-              <a:buNone/>
-            </a:pPr>
-            <a:r>
-              <a:rPr lang="en-US" sz="1000" dirty="0">
-                <a:solidFill>
-                  <a:schemeClr val="bg2"/>
-                </a:solidFill>
-              </a:rPr>
-              <a:t>Deployment pipelines review  ·  October 2026</a:t>
-            </a:r>
-            <a:endParaRPr lang="en-US" sz="1000" dirty="0"/>
-          </a:p>
-        </p:txBody>
-      </p:sp>
-      <p:sp>
-        <p:nvSpPr>
-          <p:cNvPr id="25" name="Slide Number Placeholder 0"/>
-          <p:cNvSpPr>
-            <a:spLocks noGrp="1"/>
-          </p:cNvSpPr>
-          <p:nvPr>
-            <p:ph type="sldNum" sz="quarter" idx="4294967295"/>
-          </p:nvPr>
-        </p:nvSpPr>
-        <p:spPr>
-          <a:xfrm>
-            <a:off x="11000232" y="6473952"/>
-            <a:ext cx="640080" cy="274320"/>
-          </a:xfrm>
-          <a:prstGeom prst="rect">
-            <a:avLst/>
-          </a:prstGeom>
-          <a:extLst>
-            <a:ext uri="{C572A759-6A51-4108-AA02-DFA0A04FC94B}">
-              <ma14:wrappingTextBoxFlag xmlns:ma14="http://schemas.microsoft.com/office/mac/drawingml/2011/main" val="0"/>
-            </a:ext>
-          </a:extLst>
-        </p:spPr>
-        <p:txBody>
-          <a:bodyPr lIns="0" tIns="0" rIns="0" bIns="0"/>
-          <a:lstStyle>
-            <a:lvl1pPr>
-              <a:defRPr sz="1000">
-                <a:solidFill>
-                  <a:schemeClr val="bg2"/>
-                </a:solidFill>
-              </a:defRPr>
-            </a:lvl1pPr>
-          </a:lstStyle>
-          <a:p>
-            <a:pPr algn="r"/>
-            <a:fld id="{F7021451-1387-4CA6-816F-3879F97B5CBC}" type="slidenum">
-              <a:rPr b="0" lang="en-US"/>
-              <a:t>1010</a:t>
-            </a:fld>
-            <a:endParaRPr lang="en-US"/>
-          </a:p>
-        </p:txBody>
-      </p:sp>
-    </p:spTree>
-  </p:cSld>
-  <p:clrMapOvr>
-    <a:masterClrMapping/>
-  </p:clrMapOvr>
-</p:sldLayout>
-</file>
-
 <file path=ppt/slideLayouts/slideLayout2.xml><?xml version="1.0" encoding="utf-8"?>
 <p:sldLayout xmlns:a="http://schemas.openxmlformats.org/drawingml/2006/main" xmlns:r="http://schemas.openxmlformats.org/officeDocument/2006/relationships" xmlns:p="http://schemas.openxmlformats.org/presentationml/2006/main" preserve="1">
   <p:cSld name="Title (dark)">
@@ -2221,11 +2030,11 @@
 
 <file path=ppt/slideLayouts/slideLayout4.xml><?xml version="1.0" encoding="utf-8"?>
 <p:sldLayout xmlns:a="http://schemas.openxmlformats.org/drawingml/2006/main" xmlns:r="http://schemas.openxmlformats.org/officeDocument/2006/relationships" xmlns:p="http://schemas.openxmlformats.org/presentationml/2006/main" preserve="1">
-  <p:cSld name="Screenshots 2x2">
+  <p:cSld name="Closing (dark)">
     <p:bg>
       <p:bgPr>
         <a:solidFill>
-          <a:schemeClr val="bg1"/>
+          <a:schemeClr val="tx1"/>
         </a:solidFill>
       </p:bgPr>
     </p:bg>
@@ -2269,7 +2078,7 @@
               <a:buNone/>
               <a:defRPr lang="en-US" sz="3400" b="1" dirty="0">
                 <a:solidFill>
-                  <a:schemeClr val="tx1"/>
+                  <a:schemeClr val="bg1"/>
                 </a:solidFill>
               </a:defRPr>
             </a:lvl1pPr>
@@ -2308,7 +2117,7 @@
               <a:buNone/>
               <a:defRPr lang="en-US" sz="1500" dirty="0">
                 <a:solidFill>
-                  <a:schemeClr val="tx2"/>
+                  <a:schemeClr val="accent6"/>
                 </a:solidFill>
               </a:defRPr>
             </a:lvl1pPr>
@@ -2348,200 +2157,12 @@
             <a:r>
               <a:rPr lang="en-US" sz="1000" dirty="0">
                 <a:solidFill>
-                  <a:schemeClr val="tx2"/>
+                  <a:schemeClr val="bg2"/>
                 </a:solidFill>
               </a:rPr>
               <a:t>Deployment pipelines review  ·  October 2026</a:t>
             </a:r>
             <a:endParaRPr lang="en-US" sz="1000" dirty="0"/>
-          </a:p>
-        </p:txBody>
-      </p:sp>
-      <p:sp>
-        <p:nvSpPr>
-          <p:cNvPr id="5" name="Text 1"/>
-          <p:cNvSpPr/>
-          <p:nvPr>
-            <p:ph idx="103" hasCustomPrompt="1"/>
-          </p:nvPr>
-        </p:nvSpPr>
-        <p:spPr>
-          <a:xfrm>
-            <a:off x="548640" y="1645920"/>
-            <a:ext cx="5440680" cy="1691640"/>
-          </a:xfrm>
-          <a:prstGeom prst="rect">
-            <a:avLst/>
-          </a:prstGeom>
-          <a:noFill/>
-          <a:ln/>
-        </p:spPr>
-        <p:txBody>
-          <a:bodyPr wrap="square" rtlCol="0"/>
-          <a:lstStyle>
-            <a:lvl1pPr algn="ctr" indent="0" marL="0">
-              <a:buNone/>
-              <a:defRPr lang="en-US" sz="1200" dirty="0">
-                <a:solidFill>
-                  <a:schemeClr val="tx2"/>
-                </a:solidFill>
-              </a:defRPr>
-            </a:lvl1pPr>
-          </a:lstStyle>
-          <a:p>
-            <a:pPr algn="ctr" indent="0" marL="0">
-              <a:buNone/>
-            </a:pPr>
-            <a:r>
-              <a:rPr lang="en-US" sz="1200" dirty="0">
-                <a:solidFill>
-                  <a:schemeClr val="tx2"/>
-                </a:solidFill>
-              </a:rPr>
-              <a:t>PASTE HERE — GitHub › Actions › “CloudFormation Stack using S3 as required” › open a sandbox run › crop the job graph: Prepare → Drift check → Change set → Deploy</a:t>
-            </a:r>
-            <a:endParaRPr lang="en-US" sz="1200" dirty="0"/>
-          </a:p>
-        </p:txBody>
-      </p:sp>
-      <p:sp>
-        <p:nvSpPr>
-          <p:cNvPr id="6" name="Text 1"/>
-          <p:cNvSpPr/>
-          <p:nvPr>
-            <p:ph idx="104" hasCustomPrompt="1"/>
-          </p:nvPr>
-        </p:nvSpPr>
-        <p:spPr>
-          <a:xfrm>
-            <a:off x="6199632" y="1645920"/>
-            <a:ext cx="5440680" cy="1691640"/>
-          </a:xfrm>
-          <a:prstGeom prst="rect">
-            <a:avLst/>
-          </a:prstGeom>
-          <a:noFill/>
-          <a:ln/>
-        </p:spPr>
-        <p:txBody>
-          <a:bodyPr wrap="square" rtlCol="0"/>
-          <a:lstStyle>
-            <a:lvl1pPr algn="ctr" indent="0" marL="0">
-              <a:buNone/>
-              <a:defRPr lang="en-US" sz="1200" dirty="0">
-                <a:solidFill>
-                  <a:schemeClr val="tx2"/>
-                </a:solidFill>
-              </a:defRPr>
-            </a:lvl1pPr>
-          </a:lstStyle>
-          <a:p>
-            <a:pPr algn="ctr" indent="0" marL="0">
-              <a:buNone/>
-            </a:pPr>
-            <a:r>
-              <a:rPr lang="en-US" sz="1200" dirty="0">
-                <a:solidFill>
-                  <a:schemeClr val="tx2"/>
-                </a:solidFill>
-              </a:rPr>
-              <a:t>PASTE HERE — In sandbox, change a tag by hand on a stack resource, then run the pipeline › it stops at Drift check › Summary › crop “Drift found”, the table and expected / actual. Undo the edit afterwards.</a:t>
-            </a:r>
-            <a:endParaRPr lang="en-US" sz="1200" dirty="0"/>
-          </a:p>
-        </p:txBody>
-      </p:sp>
-      <p:sp>
-        <p:nvSpPr>
-          <p:cNvPr id="7" name="Text 1"/>
-          <p:cNvSpPr/>
-          <p:nvPr>
-            <p:ph idx="105" hasCustomPrompt="1"/>
-          </p:nvPr>
-        </p:nvSpPr>
-        <p:spPr>
-          <a:xfrm>
-            <a:off x="548640" y="4041648"/>
-            <a:ext cx="5440680" cy="1691640"/>
-          </a:xfrm>
-          <a:prstGeom prst="rect">
-            <a:avLst/>
-          </a:prstGeom>
-          <a:noFill/>
-          <a:ln/>
-        </p:spPr>
-        <p:txBody>
-          <a:bodyPr wrap="square" rtlCol="0"/>
-          <a:lstStyle>
-            <a:lvl1pPr algn="ctr" indent="0" marL="0">
-              <a:buNone/>
-              <a:defRPr lang="en-US" sz="1200" dirty="0">
-                <a:solidFill>
-                  <a:schemeClr val="tx2"/>
-                </a:solidFill>
-              </a:defRPr>
-            </a:lvl1pPr>
-          </a:lstStyle>
-          <a:p>
-            <a:pPr algn="ctr" indent="0" marL="0">
-              <a:buNone/>
-            </a:pPr>
-            <a:r>
-              <a:rPr lang="en-US" sz="1200" dirty="0">
-                <a:solidFill>
-                  <a:schemeClr val="tx2"/>
-                </a:solidFill>
-              </a:rPr>
-              <a:t>PASTE HERE — A run with a real change (Deploy = no) › Summary › crop “Change set ready for review”, the add / modify / remove counts and the table</a:t>
-            </a:r>
-            <a:endParaRPr lang="en-US" sz="1200" dirty="0"/>
-          </a:p>
-        </p:txBody>
-      </p:sp>
-      <p:sp>
-        <p:nvSpPr>
-          <p:cNvPr id="8" name="Text 1"/>
-          <p:cNvSpPr/>
-          <p:nvPr>
-            <p:ph idx="106" hasCustomPrompt="1"/>
-          </p:nvPr>
-        </p:nvSpPr>
-        <p:spPr>
-          <a:xfrm>
-            <a:off x="6199632" y="4041648"/>
-            <a:ext cx="5440680" cy="1691640"/>
-          </a:xfrm>
-          <a:prstGeom prst="rect">
-            <a:avLst/>
-          </a:prstGeom>
-          <a:noFill/>
-          <a:ln/>
-        </p:spPr>
-        <p:txBody>
-          <a:bodyPr wrap="square" rtlCol="0"/>
-          <a:lstStyle>
-            <a:lvl1pPr algn="ctr" indent="0" marL="0">
-              <a:buNone/>
-              <a:defRPr lang="en-US" sz="1200" dirty="0">
-                <a:solidFill>
-                  <a:schemeClr val="tx2"/>
-                </a:solidFill>
-              </a:defRPr>
-            </a:lvl1pPr>
-          </a:lstStyle>
-          <a:p>
-            <a:pPr algn="ctr" indent="0" marL="0">
-              <a:buNone/>
-            </a:pPr>
-            <a:r>
-              <a:rPr lang="en-US" sz="1200" dirty="0">
-                <a:solidFill>
-                  <a:schemeClr val="tx2"/>
-                </a:solidFill>
-              </a:rPr>
-              <a:t>PASTE HERE — Click “Review and execute it in the AWS console” in that Summary › crop the change set page: the Changes list and the “Execute change set” button</a:t>
-            </a:r>
-            <a:endParaRPr lang="en-US" sz="1200" dirty="0"/>
           </a:p>
         </p:txBody>
       </p:sp>
@@ -2575,7 +2196,7 @@
             <a:lvl1pPr>
               <a:defRPr sz="1000">
                 <a:solidFill>
-                  <a:schemeClr val="tx2"/>
+                  <a:schemeClr val="bg2"/>
                 </a:solidFill>
               </a:defRPr>
             </a:lvl1pPr>
@@ -2585,1243 +2206,6 @@
             <a:fld id="{F7021451-1387-4CA6-816F-3879F97B5CBC}" type="slidenum">
               <a:rPr b="0" lang="en-US"/>
               <a:t>1004</a:t>
-            </a:fld>
-            <a:endParaRPr lang="en-US"/>
-          </a:p>
-        </p:txBody>
-      </p:sp>
-    </p:spTree>
-  </p:cSld>
-  <p:clrMapOvr>
-    <a:masterClrMapping/>
-  </p:clrMapOvr>
-</p:sldLayout>
-</file>
-
-<file path=ppt/slideLayouts/slideLayout5.xml><?xml version="1.0" encoding="utf-8"?>
-<p:sldLayout xmlns:a="http://schemas.openxmlformats.org/drawingml/2006/main" xmlns:r="http://schemas.openxmlformats.org/officeDocument/2006/relationships" xmlns:p="http://schemas.openxmlformats.org/presentationml/2006/main" preserve="1">
-  <p:cSld name="Text and screenshot (WS2)">
-    <p:bg>
-      <p:bgPr>
-        <a:solidFill>
-          <a:schemeClr val="bg1"/>
-        </a:solidFill>
-      </p:bgPr>
-    </p:bg>
-    <p:spTree>
-      <p:nvGrpSpPr>
-        <p:cNvPr id="1" name=""/>
-        <p:cNvGrpSpPr/>
-        <p:nvPr/>
-      </p:nvGrpSpPr>
-      <p:grpSpPr>
-        <a:xfrm>
-          <a:off x="0" y="0"/>
-          <a:ext cx="0" cy="0"/>
-          <a:chOff x="0" y="0"/>
-          <a:chExt cx="0" cy="0"/>
-        </a:xfrm>
-      </p:grpSpPr>
-      <p:sp>
-        <p:nvSpPr>
-          <p:cNvPr id="2" name="Text 0"/>
-          <p:cNvSpPr/>
-          <p:nvPr>
-            <p:ph idx="100" type="title" hasCustomPrompt="1"/>
-          </p:nvPr>
-        </p:nvSpPr>
-        <p:spPr>
-          <a:xfrm>
-            <a:off x="548640" y="384048"/>
-            <a:ext cx="9144000" cy="713232"/>
-          </a:xfrm>
-          <a:prstGeom prst="rect">
-            <a:avLst/>
-          </a:prstGeom>
-          <a:noFill/>
-          <a:ln/>
-        </p:spPr>
-        <p:txBody>
-          <a:bodyPr wrap="square" rtlCol="0"/>
-          <a:lstStyle>
-            <a:lvl1pPr algn="l" indent="0" marL="0">
-              <a:buNone/>
-              <a:defRPr lang="en-US" sz="3400" b="1" dirty="0">
-                <a:solidFill>
-                  <a:schemeClr val="tx1"/>
-                </a:solidFill>
-              </a:defRPr>
-            </a:lvl1pPr>
-          </a:lstStyle>
-          <a:p>
-            <a:pPr algn="l" indent="0" marL="0">
-              <a:buNone/>
-            </a:pPr>
-            <a:endParaRPr lang="en-US" sz="3400" dirty="0"/>
-          </a:p>
-        </p:txBody>
-      </p:sp>
-      <p:sp>
-        <p:nvSpPr>
-          <p:cNvPr id="3" name="Text 0"/>
-          <p:cNvSpPr/>
-          <p:nvPr>
-            <p:ph idx="101" type="body" hasCustomPrompt="1"/>
-          </p:nvPr>
-        </p:nvSpPr>
-        <p:spPr>
-          <a:xfrm>
-            <a:off x="548640" y="1097280"/>
-            <a:ext cx="11091672" cy="384048"/>
-          </a:xfrm>
-          <a:prstGeom prst="rect">
-            <a:avLst/>
-          </a:prstGeom>
-          <a:noFill/>
-          <a:ln/>
-        </p:spPr>
-        <p:txBody>
-          <a:bodyPr wrap="square" rtlCol="0"/>
-          <a:lstStyle>
-            <a:lvl1pPr indent="0" marL="0">
-              <a:buNone/>
-              <a:defRPr lang="en-US" sz="1500" dirty="0">
-                <a:solidFill>
-                  <a:schemeClr val="tx2"/>
-                </a:solidFill>
-              </a:defRPr>
-            </a:lvl1pPr>
-          </a:lstStyle>
-          <a:p>
-            <a:pPr indent="0" marL="0">
-              <a:buNone/>
-            </a:pPr>
-            <a:endParaRPr lang="en-US" sz="1500" dirty="0"/>
-          </a:p>
-        </p:txBody>
-      </p:sp>
-      <p:sp>
-        <p:nvSpPr>
-          <p:cNvPr id="4" name="Text 0"/>
-          <p:cNvSpPr/>
-          <p:nvPr/>
-        </p:nvSpPr>
-        <p:spPr>
-          <a:xfrm>
-            <a:off x="548640" y="6473952"/>
-            <a:ext cx="6400800" cy="274320"/>
-          </a:xfrm>
-          <a:prstGeom prst="rect">
-            <a:avLst/>
-          </a:prstGeom>
-          <a:noFill/>
-          <a:ln/>
-        </p:spPr>
-        <p:txBody>
-          <a:bodyPr wrap="square" lIns="0" tIns="0" rIns="0" bIns="0" rtlCol="0" anchor="t"/>
-          <a:lstStyle/>
-          <a:p>
-            <a:pPr indent="0" marL="0">
-              <a:buNone/>
-            </a:pPr>
-            <a:r>
-              <a:rPr lang="en-US" sz="1000" dirty="0">
-                <a:solidFill>
-                  <a:schemeClr val="tx2"/>
-                </a:solidFill>
-              </a:rPr>
-              <a:t>Deployment pipelines review  ·  October 2026</a:t>
-            </a:r>
-            <a:endParaRPr lang="en-US" sz="1000" dirty="0"/>
-          </a:p>
-        </p:txBody>
-      </p:sp>
-      <p:sp>
-        <p:nvSpPr>
-          <p:cNvPr id="5" name="Text 1"/>
-          <p:cNvSpPr/>
-          <p:nvPr>
-            <p:ph idx="103" hasCustomPrompt="1"/>
-          </p:nvPr>
-        </p:nvSpPr>
-        <p:spPr>
-          <a:xfrm>
-            <a:off x="7498080" y="1691640"/>
-            <a:ext cx="4142232" cy="3246120"/>
-          </a:xfrm>
-          <a:prstGeom prst="rect">
-            <a:avLst/>
-          </a:prstGeom>
-          <a:noFill/>
-          <a:ln/>
-        </p:spPr>
-        <p:txBody>
-          <a:bodyPr wrap="square" rtlCol="0"/>
-          <a:lstStyle>
-            <a:lvl1pPr algn="ctr" indent="0" marL="0">
-              <a:buNone/>
-              <a:defRPr lang="en-US" sz="1200" dirty="0">
-                <a:solidFill>
-                  <a:schemeClr val="tx2"/>
-                </a:solidFill>
-              </a:defRPr>
-            </a:lvl1pPr>
-          </a:lstStyle>
-          <a:p>
-            <a:pPr algn="ctr" indent="0" marL="0">
-              <a:buNone/>
-            </a:pPr>
-            <a:r>
-              <a:rPr lang="en-US" sz="1200" dirty="0">
-                <a:solidFill>
-                  <a:schemeClr val="tx2"/>
-                </a:solidFill>
-              </a:rPr>
-              <a:t>PASTE HERE — GitHub › ws2-dns-records-apply.yml › click line 418, Shift+click line 444 › crop the “gate-approval” heading with no job under it, and the apply job’s needs: [validate-account, preview]</a:t>
-            </a:r>
-            <a:endParaRPr lang="en-US" sz="1200" dirty="0"/>
-          </a:p>
-        </p:txBody>
-      </p:sp>
-      <p:sp>
-        <p:nvSpPr>
-          <p:cNvPr id="25" name="Slide Number Placeholder 0"/>
-          <p:cNvSpPr>
-            <a:spLocks noGrp="1"/>
-          </p:cNvSpPr>
-          <p:nvPr>
-            <p:ph type="sldNum" sz="quarter" idx="4294967295"/>
-          </p:nvPr>
-        </p:nvSpPr>
-        <p:spPr>
-          <a:xfrm>
-            <a:off x="11000232" y="6473952"/>
-            <a:ext cx="640080" cy="274320"/>
-          </a:xfrm>
-          <a:prstGeom prst="rect">
-            <a:avLst/>
-          </a:prstGeom>
-          <a:extLst>
-            <a:ext uri="{C572A759-6A51-4108-AA02-DFA0A04FC94B}">
-              <ma14:wrappingTextBoxFlag xmlns:ma14="http://schemas.microsoft.com/office/mac/drawingml/2011/main" val="0"/>
-            </a:ext>
-          </a:extLst>
-        </p:spPr>
-        <p:txBody>
-          <a:bodyPr lIns="0" tIns="0" rIns="0" bIns="0"/>
-          <a:lstStyle>
-            <a:lvl1pPr>
-              <a:defRPr sz="1000">
-                <a:solidFill>
-                  <a:schemeClr val="tx2"/>
-                </a:solidFill>
-              </a:defRPr>
-            </a:lvl1pPr>
-          </a:lstStyle>
-          <a:p>
-            <a:pPr algn="r"/>
-            <a:fld id="{F7021451-1387-4CA6-816F-3879F97B5CBC}" type="slidenum">
-              <a:rPr b="0" lang="en-US"/>
-              <a:t>1005</a:t>
-            </a:fld>
-            <a:endParaRPr lang="en-US"/>
-          </a:p>
-        </p:txBody>
-      </p:sp>
-    </p:spTree>
-  </p:cSld>
-  <p:clrMapOvr>
-    <a:masterClrMapping/>
-  </p:clrMapOvr>
-</p:sldLayout>
-</file>
-
-<file path=ppt/slideLayouts/slideLayout6.xml><?xml version="1.0" encoding="utf-8"?>
-<p:sldLayout xmlns:a="http://schemas.openxmlformats.org/drawingml/2006/main" xmlns:r="http://schemas.openxmlformats.org/officeDocument/2006/relationships" xmlns:p="http://schemas.openxmlformats.org/presentationml/2006/main" preserve="1">
-  <p:cSld name="Text and screenshot (Git history)">
-    <p:bg>
-      <p:bgPr>
-        <a:solidFill>
-          <a:schemeClr val="bg1"/>
-        </a:solidFill>
-      </p:bgPr>
-    </p:bg>
-    <p:spTree>
-      <p:nvGrpSpPr>
-        <p:cNvPr id="1" name=""/>
-        <p:cNvGrpSpPr/>
-        <p:nvPr/>
-      </p:nvGrpSpPr>
-      <p:grpSpPr>
-        <a:xfrm>
-          <a:off x="0" y="0"/>
-          <a:ext cx="0" cy="0"/>
-          <a:chOff x="0" y="0"/>
-          <a:chExt cx="0" cy="0"/>
-        </a:xfrm>
-      </p:grpSpPr>
-      <p:sp>
-        <p:nvSpPr>
-          <p:cNvPr id="2" name="Text 0"/>
-          <p:cNvSpPr/>
-          <p:nvPr>
-            <p:ph idx="100" type="title" hasCustomPrompt="1"/>
-          </p:nvPr>
-        </p:nvSpPr>
-        <p:spPr>
-          <a:xfrm>
-            <a:off x="548640" y="384048"/>
-            <a:ext cx="9144000" cy="713232"/>
-          </a:xfrm>
-          <a:prstGeom prst="rect">
-            <a:avLst/>
-          </a:prstGeom>
-          <a:noFill/>
-          <a:ln/>
-        </p:spPr>
-        <p:txBody>
-          <a:bodyPr wrap="square" rtlCol="0"/>
-          <a:lstStyle>
-            <a:lvl1pPr algn="l" indent="0" marL="0">
-              <a:buNone/>
-              <a:defRPr lang="en-US" sz="3400" b="1" dirty="0">
-                <a:solidFill>
-                  <a:schemeClr val="tx1"/>
-                </a:solidFill>
-              </a:defRPr>
-            </a:lvl1pPr>
-          </a:lstStyle>
-          <a:p>
-            <a:pPr algn="l" indent="0" marL="0">
-              <a:buNone/>
-            </a:pPr>
-            <a:endParaRPr lang="en-US" sz="3400" dirty="0"/>
-          </a:p>
-        </p:txBody>
-      </p:sp>
-      <p:sp>
-        <p:nvSpPr>
-          <p:cNvPr id="3" name="Text 0"/>
-          <p:cNvSpPr/>
-          <p:nvPr>
-            <p:ph idx="101" type="body" hasCustomPrompt="1"/>
-          </p:nvPr>
-        </p:nvSpPr>
-        <p:spPr>
-          <a:xfrm>
-            <a:off x="548640" y="1097280"/>
-            <a:ext cx="11091672" cy="384048"/>
-          </a:xfrm>
-          <a:prstGeom prst="rect">
-            <a:avLst/>
-          </a:prstGeom>
-          <a:noFill/>
-          <a:ln/>
-        </p:spPr>
-        <p:txBody>
-          <a:bodyPr wrap="square" rtlCol="0"/>
-          <a:lstStyle>
-            <a:lvl1pPr indent="0" marL="0">
-              <a:buNone/>
-              <a:defRPr lang="en-US" sz="1500" dirty="0">
-                <a:solidFill>
-                  <a:schemeClr val="tx2"/>
-                </a:solidFill>
-              </a:defRPr>
-            </a:lvl1pPr>
-          </a:lstStyle>
-          <a:p>
-            <a:pPr indent="0" marL="0">
-              <a:buNone/>
-            </a:pPr>
-            <a:endParaRPr lang="en-US" sz="1500" dirty="0"/>
-          </a:p>
-        </p:txBody>
-      </p:sp>
-      <p:sp>
-        <p:nvSpPr>
-          <p:cNvPr id="4" name="Text 0"/>
-          <p:cNvSpPr/>
-          <p:nvPr/>
-        </p:nvSpPr>
-        <p:spPr>
-          <a:xfrm>
-            <a:off x="548640" y="6473952"/>
-            <a:ext cx="6400800" cy="274320"/>
-          </a:xfrm>
-          <a:prstGeom prst="rect">
-            <a:avLst/>
-          </a:prstGeom>
-          <a:noFill/>
-          <a:ln/>
-        </p:spPr>
-        <p:txBody>
-          <a:bodyPr wrap="square" lIns="0" tIns="0" rIns="0" bIns="0" rtlCol="0" anchor="t"/>
-          <a:lstStyle/>
-          <a:p>
-            <a:pPr indent="0" marL="0">
-              <a:buNone/>
-            </a:pPr>
-            <a:r>
-              <a:rPr lang="en-US" sz="1000" dirty="0">
-                <a:solidFill>
-                  <a:schemeClr val="tx2"/>
-                </a:solidFill>
-              </a:rPr>
-              <a:t>Deployment pipelines review  ·  October 2026</a:t>
-            </a:r>
-            <a:endParaRPr lang="en-US" sz="1000" dirty="0"/>
-          </a:p>
-        </p:txBody>
-      </p:sp>
-      <p:sp>
-        <p:nvSpPr>
-          <p:cNvPr id="5" name="Text 1"/>
-          <p:cNvSpPr/>
-          <p:nvPr>
-            <p:ph idx="103" hasCustomPrompt="1"/>
-          </p:nvPr>
-        </p:nvSpPr>
-        <p:spPr>
-          <a:xfrm>
-            <a:off x="8275320" y="1691640"/>
-            <a:ext cx="3364992" cy="3566160"/>
-          </a:xfrm>
-          <a:prstGeom prst="rect">
-            <a:avLst/>
-          </a:prstGeom>
-          <a:noFill/>
-          <a:ln/>
-        </p:spPr>
-        <p:txBody>
-          <a:bodyPr wrap="square" rtlCol="0"/>
-          <a:lstStyle>
-            <a:lvl1pPr algn="ctr" indent="0" marL="0">
-              <a:buNone/>
-              <a:defRPr lang="en-US" sz="1200" dirty="0">
-                <a:solidFill>
-                  <a:schemeClr val="tx2"/>
-                </a:solidFill>
-              </a:defRPr>
-            </a:lvl1pPr>
-          </a:lstStyle>
-          <a:p>
-            <a:pPr algn="ctr" indent="0" marL="0">
-              <a:buNone/>
-            </a:pPr>
-            <a:r>
-              <a:rPr lang="en-US" sz="1200" dirty="0">
-                <a:solidFill>
-                  <a:schemeClr val="tx2"/>
-                </a:solidFill>
-              </a:rPr>
-              <a:t>PASTE HERE — GitHub › your DNS record template file › History › crop the list of commits — or open a merged Pull Request › Files changed › crop one record’s before / after</a:t>
-            </a:r>
-            <a:endParaRPr lang="en-US" sz="1200" dirty="0"/>
-          </a:p>
-        </p:txBody>
-      </p:sp>
-      <p:sp>
-        <p:nvSpPr>
-          <p:cNvPr id="25" name="Slide Number Placeholder 0"/>
-          <p:cNvSpPr>
-            <a:spLocks noGrp="1"/>
-          </p:cNvSpPr>
-          <p:nvPr>
-            <p:ph type="sldNum" sz="quarter" idx="4294967295"/>
-          </p:nvPr>
-        </p:nvSpPr>
-        <p:spPr>
-          <a:xfrm>
-            <a:off x="11000232" y="6473952"/>
-            <a:ext cx="640080" cy="274320"/>
-          </a:xfrm>
-          <a:prstGeom prst="rect">
-            <a:avLst/>
-          </a:prstGeom>
-          <a:extLst>
-            <a:ext uri="{C572A759-6A51-4108-AA02-DFA0A04FC94B}">
-              <ma14:wrappingTextBoxFlag xmlns:ma14="http://schemas.microsoft.com/office/mac/drawingml/2011/main" val="0"/>
-            </a:ext>
-          </a:extLst>
-        </p:spPr>
-        <p:txBody>
-          <a:bodyPr lIns="0" tIns="0" rIns="0" bIns="0"/>
-          <a:lstStyle>
-            <a:lvl1pPr>
-              <a:defRPr sz="1000">
-                <a:solidFill>
-                  <a:schemeClr val="tx2"/>
-                </a:solidFill>
-              </a:defRPr>
-            </a:lvl1pPr>
-          </a:lstStyle>
-          <a:p>
-            <a:pPr algn="r"/>
-            <a:fld id="{F7021451-1387-4CA6-816F-3879F97B5CBC}" type="slidenum">
-              <a:rPr b="0" lang="en-US"/>
-              <a:t>1006</a:t>
-            </a:fld>
-            <a:endParaRPr lang="en-US"/>
-          </a:p>
-        </p:txBody>
-      </p:sp>
-    </p:spTree>
-  </p:cSld>
-  <p:clrMapOvr>
-    <a:masterClrMapping/>
-  </p:clrMapOvr>
-</p:sldLayout>
-</file>
-
-<file path=ppt/slideLayouts/slideLayout7.xml><?xml version="1.0" encoding="utf-8"?>
-<p:sldLayout xmlns:a="http://schemas.openxmlformats.org/drawingml/2006/main" xmlns:r="http://schemas.openxmlformats.org/officeDocument/2006/relationships" xmlns:p="http://schemas.openxmlformats.org/presentationml/2006/main" preserve="1">
-  <p:cSld name="Backup files side by side">
-    <p:bg>
-      <p:bgPr>
-        <a:solidFill>
-          <a:schemeClr val="bg1"/>
-        </a:solidFill>
-      </p:bgPr>
-    </p:bg>
-    <p:spTree>
-      <p:nvGrpSpPr>
-        <p:cNvPr id="1" name=""/>
-        <p:cNvGrpSpPr/>
-        <p:nvPr/>
-      </p:nvGrpSpPr>
-      <p:grpSpPr>
-        <a:xfrm>
-          <a:off x="0" y="0"/>
-          <a:ext cx="0" cy="0"/>
-          <a:chOff x="0" y="0"/>
-          <a:chExt cx="0" cy="0"/>
-        </a:xfrm>
-      </p:grpSpPr>
-      <p:sp>
-        <p:nvSpPr>
-          <p:cNvPr id="2" name="Text 0"/>
-          <p:cNvSpPr/>
-          <p:nvPr>
-            <p:ph idx="100" type="title" hasCustomPrompt="1"/>
-          </p:nvPr>
-        </p:nvSpPr>
-        <p:spPr>
-          <a:xfrm>
-            <a:off x="548640" y="384048"/>
-            <a:ext cx="9144000" cy="713232"/>
-          </a:xfrm>
-          <a:prstGeom prst="rect">
-            <a:avLst/>
-          </a:prstGeom>
-          <a:noFill/>
-          <a:ln/>
-        </p:spPr>
-        <p:txBody>
-          <a:bodyPr wrap="square" rtlCol="0"/>
-          <a:lstStyle>
-            <a:lvl1pPr algn="l" indent="0" marL="0">
-              <a:buNone/>
-              <a:defRPr lang="en-US" sz="3400" b="1" dirty="0">
-                <a:solidFill>
-                  <a:schemeClr val="tx1"/>
-                </a:solidFill>
-              </a:defRPr>
-            </a:lvl1pPr>
-          </a:lstStyle>
-          <a:p>
-            <a:pPr algn="l" indent="0" marL="0">
-              <a:buNone/>
-            </a:pPr>
-            <a:endParaRPr lang="en-US" sz="3400" dirty="0"/>
-          </a:p>
-        </p:txBody>
-      </p:sp>
-      <p:sp>
-        <p:nvSpPr>
-          <p:cNvPr id="3" name="Text 0"/>
-          <p:cNvSpPr/>
-          <p:nvPr>
-            <p:ph idx="101" type="body" hasCustomPrompt="1"/>
-          </p:nvPr>
-        </p:nvSpPr>
-        <p:spPr>
-          <a:xfrm>
-            <a:off x="548640" y="1097280"/>
-            <a:ext cx="11091672" cy="384048"/>
-          </a:xfrm>
-          <a:prstGeom prst="rect">
-            <a:avLst/>
-          </a:prstGeom>
-          <a:noFill/>
-          <a:ln/>
-        </p:spPr>
-        <p:txBody>
-          <a:bodyPr wrap="square" rtlCol="0"/>
-          <a:lstStyle>
-            <a:lvl1pPr indent="0" marL="0">
-              <a:buNone/>
-              <a:defRPr lang="en-US" sz="1500" dirty="0">
-                <a:solidFill>
-                  <a:schemeClr val="tx2"/>
-                </a:solidFill>
-              </a:defRPr>
-            </a:lvl1pPr>
-          </a:lstStyle>
-          <a:p>
-            <a:pPr indent="0" marL="0">
-              <a:buNone/>
-            </a:pPr>
-            <a:endParaRPr lang="en-US" sz="1500" dirty="0"/>
-          </a:p>
-        </p:txBody>
-      </p:sp>
-      <p:sp>
-        <p:nvSpPr>
-          <p:cNvPr id="4" name="Text 0"/>
-          <p:cNvSpPr/>
-          <p:nvPr/>
-        </p:nvSpPr>
-        <p:spPr>
-          <a:xfrm>
-            <a:off x="548640" y="6473952"/>
-            <a:ext cx="6400800" cy="274320"/>
-          </a:xfrm>
-          <a:prstGeom prst="rect">
-            <a:avLst/>
-          </a:prstGeom>
-          <a:noFill/>
-          <a:ln/>
-        </p:spPr>
-        <p:txBody>
-          <a:bodyPr wrap="square" lIns="0" tIns="0" rIns="0" bIns="0" rtlCol="0" anchor="t"/>
-          <a:lstStyle/>
-          <a:p>
-            <a:pPr indent="0" marL="0">
-              <a:buNone/>
-            </a:pPr>
-            <a:r>
-              <a:rPr lang="en-US" sz="1000" dirty="0">
-                <a:solidFill>
-                  <a:schemeClr val="tx2"/>
-                </a:solidFill>
-              </a:rPr>
-              <a:t>Deployment pipelines review  ·  October 2026</a:t>
-            </a:r>
-            <a:endParaRPr lang="en-US" sz="1000" dirty="0"/>
-          </a:p>
-        </p:txBody>
-      </p:sp>
-      <p:sp>
-        <p:nvSpPr>
-          <p:cNvPr id="5" name="Text 1"/>
-          <p:cNvSpPr/>
-          <p:nvPr>
-            <p:ph idx="103" hasCustomPrompt="1"/>
-          </p:nvPr>
-        </p:nvSpPr>
-        <p:spPr>
-          <a:xfrm>
-            <a:off x="731520" y="2331720"/>
-            <a:ext cx="5074920" cy="2468880"/>
-          </a:xfrm>
-          <a:prstGeom prst="rect">
-            <a:avLst/>
-          </a:prstGeom>
-          <a:noFill/>
-          <a:ln/>
-        </p:spPr>
-        <p:txBody>
-          <a:bodyPr wrap="square" rtlCol="0"/>
-          <a:lstStyle>
-            <a:lvl1pPr algn="ctr" indent="0" marL="0">
-              <a:buNone/>
-              <a:defRPr lang="en-US" sz="1200" dirty="0">
-                <a:solidFill>
-                  <a:schemeClr val="tx2"/>
-                </a:solidFill>
-              </a:defRPr>
-            </a:lvl1pPr>
-          </a:lstStyle>
-          <a:p>
-            <a:pPr algn="ctr" indent="0" marL="0">
-              <a:buNone/>
-            </a:pPr>
-            <a:r>
-              <a:rPr lang="en-US" sz="1200" dirty="0">
-                <a:solidFill>
-                  <a:schemeClr val="tx2"/>
-                </a:solidFill>
-              </a:rPr>
-              <a:t>PASTE HERE — WS2 export Pull Request › Files changed › config/accounts/&lt;account&gt;/networking/dns-records-&lt;zone&gt;.json › crop the start of the file: a list of records, with no hosted zone, SOA or NS</a:t>
-            </a:r>
-            <a:endParaRPr lang="en-US" sz="1200" dirty="0"/>
-          </a:p>
-        </p:txBody>
-      </p:sp>
-      <p:sp>
-        <p:nvSpPr>
-          <p:cNvPr id="6" name="Text 1"/>
-          <p:cNvSpPr/>
-          <p:nvPr>
-            <p:ph idx="104" hasCustomPrompt="1"/>
-          </p:nvPr>
-        </p:nvSpPr>
-        <p:spPr>
-          <a:xfrm>
-            <a:off x="6382512" y="2331720"/>
-            <a:ext cx="5074920" cy="2468880"/>
-          </a:xfrm>
-          <a:prstGeom prst="rect">
-            <a:avLst/>
-          </a:prstGeom>
-          <a:noFill/>
-          <a:ln/>
-        </p:spPr>
-        <p:txBody>
-          <a:bodyPr wrap="square" rtlCol="0"/>
-          <a:lstStyle>
-            <a:lvl1pPr algn="ctr" indent="0" marL="0">
-              <a:buNone/>
-              <a:defRPr lang="en-US" sz="1200" dirty="0">
-                <a:solidFill>
-                  <a:schemeClr val="tx2"/>
-                </a:solidFill>
-              </a:defRPr>
-            </a:lvl1pPr>
-          </a:lstStyle>
-          <a:p>
-            <a:pPr algn="ctr" indent="0" marL="0">
-              <a:buNone/>
-            </a:pPr>
-            <a:r>
-              <a:rPr lang="en-US" sz="1200" dirty="0">
-                <a:solidFill>
-                  <a:schemeClr val="tx2"/>
-                </a:solidFill>
-              </a:rPr>
-              <a:t>PASTE HERE — GitHub › the same zone’s CloudFormation template (YAML) › crop the top: the AWS::Route53::HostedZone resource, then the first AWS::Route53::RecordSet resources (include an alias record if you can)</a:t>
-            </a:r>
-            <a:endParaRPr lang="en-US" sz="1200" dirty="0"/>
-          </a:p>
-        </p:txBody>
-      </p:sp>
-      <p:sp>
-        <p:nvSpPr>
-          <p:cNvPr id="25" name="Slide Number Placeholder 0"/>
-          <p:cNvSpPr>
-            <a:spLocks noGrp="1"/>
-          </p:cNvSpPr>
-          <p:nvPr>
-            <p:ph type="sldNum" sz="quarter" idx="4294967295"/>
-          </p:nvPr>
-        </p:nvSpPr>
-        <p:spPr>
-          <a:xfrm>
-            <a:off x="11000232" y="6473952"/>
-            <a:ext cx="640080" cy="274320"/>
-          </a:xfrm>
-          <a:prstGeom prst="rect">
-            <a:avLst/>
-          </a:prstGeom>
-          <a:extLst>
-            <a:ext uri="{C572A759-6A51-4108-AA02-DFA0A04FC94B}">
-              <ma14:wrappingTextBoxFlag xmlns:ma14="http://schemas.microsoft.com/office/mac/drawingml/2011/main" val="0"/>
-            </a:ext>
-          </a:extLst>
-        </p:spPr>
-        <p:txBody>
-          <a:bodyPr lIns="0" tIns="0" rIns="0" bIns="0"/>
-          <a:lstStyle>
-            <a:lvl1pPr>
-              <a:defRPr sz="1000">
-                <a:solidFill>
-                  <a:schemeClr val="tx2"/>
-                </a:solidFill>
-              </a:defRPr>
-            </a:lvl1pPr>
-          </a:lstStyle>
-          <a:p>
-            <a:pPr algn="r"/>
-            <a:fld id="{F7021451-1387-4CA6-816F-3879F97B5CBC}" type="slidenum">
-              <a:rPr b="0" lang="en-US"/>
-              <a:t>1007</a:t>
-            </a:fld>
-            <a:endParaRPr lang="en-US"/>
-          </a:p>
-        </p:txBody>
-      </p:sp>
-    </p:spTree>
-  </p:cSld>
-  <p:clrMapOvr>
-    <a:masterClrMapping/>
-  </p:clrMapOvr>
-</p:sldLayout>
-</file>
-
-<file path=ppt/slideLayouts/slideLayout8.xml><?xml version="1.0" encoding="utf-8"?>
-<p:sldLayout xmlns:a="http://schemas.openxmlformats.org/drawingml/2006/main" xmlns:r="http://schemas.openxmlformats.org/officeDocument/2006/relationships" xmlns:p="http://schemas.openxmlformats.org/presentationml/2006/main" preserve="1">
-  <p:cSld name="Flow and screenshot">
-    <p:bg>
-      <p:bgPr>
-        <a:solidFill>
-          <a:schemeClr val="bg1"/>
-        </a:solidFill>
-      </p:bgPr>
-    </p:bg>
-    <p:spTree>
-      <p:nvGrpSpPr>
-        <p:cNvPr id="1" name=""/>
-        <p:cNvGrpSpPr/>
-        <p:nvPr/>
-      </p:nvGrpSpPr>
-      <p:grpSpPr>
-        <a:xfrm>
-          <a:off x="0" y="0"/>
-          <a:ext cx="0" cy="0"/>
-          <a:chOff x="0" y="0"/>
-          <a:chExt cx="0" cy="0"/>
-        </a:xfrm>
-      </p:grpSpPr>
-      <p:sp>
-        <p:nvSpPr>
-          <p:cNvPr id="2" name="Text 0"/>
-          <p:cNvSpPr/>
-          <p:nvPr>
-            <p:ph idx="100" type="title" hasCustomPrompt="1"/>
-          </p:nvPr>
-        </p:nvSpPr>
-        <p:spPr>
-          <a:xfrm>
-            <a:off x="548640" y="384048"/>
-            <a:ext cx="9144000" cy="713232"/>
-          </a:xfrm>
-          <a:prstGeom prst="rect">
-            <a:avLst/>
-          </a:prstGeom>
-          <a:noFill/>
-          <a:ln/>
-        </p:spPr>
-        <p:txBody>
-          <a:bodyPr wrap="square" rtlCol="0"/>
-          <a:lstStyle>
-            <a:lvl1pPr algn="l" indent="0" marL="0">
-              <a:buNone/>
-              <a:defRPr lang="en-US" sz="3400" b="1" dirty="0">
-                <a:solidFill>
-                  <a:schemeClr val="tx1"/>
-                </a:solidFill>
-              </a:defRPr>
-            </a:lvl1pPr>
-          </a:lstStyle>
-          <a:p>
-            <a:pPr algn="l" indent="0" marL="0">
-              <a:buNone/>
-            </a:pPr>
-            <a:endParaRPr lang="en-US" sz="3400" dirty="0"/>
-          </a:p>
-        </p:txBody>
-      </p:sp>
-      <p:sp>
-        <p:nvSpPr>
-          <p:cNvPr id="3" name="Text 0"/>
-          <p:cNvSpPr/>
-          <p:nvPr>
-            <p:ph idx="101" type="body" hasCustomPrompt="1"/>
-          </p:nvPr>
-        </p:nvSpPr>
-        <p:spPr>
-          <a:xfrm>
-            <a:off x="548640" y="1097280"/>
-            <a:ext cx="11091672" cy="384048"/>
-          </a:xfrm>
-          <a:prstGeom prst="rect">
-            <a:avLst/>
-          </a:prstGeom>
-          <a:noFill/>
-          <a:ln/>
-        </p:spPr>
-        <p:txBody>
-          <a:bodyPr wrap="square" rtlCol="0"/>
-          <a:lstStyle>
-            <a:lvl1pPr indent="0" marL="0">
-              <a:buNone/>
-              <a:defRPr lang="en-US" sz="1500" dirty="0">
-                <a:solidFill>
-                  <a:schemeClr val="tx2"/>
-                </a:solidFill>
-              </a:defRPr>
-            </a:lvl1pPr>
-          </a:lstStyle>
-          <a:p>
-            <a:pPr indent="0" marL="0">
-              <a:buNone/>
-            </a:pPr>
-            <a:endParaRPr lang="en-US" sz="1500" dirty="0"/>
-          </a:p>
-        </p:txBody>
-      </p:sp>
-      <p:sp>
-        <p:nvSpPr>
-          <p:cNvPr id="4" name="Text 0"/>
-          <p:cNvSpPr/>
-          <p:nvPr/>
-        </p:nvSpPr>
-        <p:spPr>
-          <a:xfrm>
-            <a:off x="548640" y="6473952"/>
-            <a:ext cx="6400800" cy="274320"/>
-          </a:xfrm>
-          <a:prstGeom prst="rect">
-            <a:avLst/>
-          </a:prstGeom>
-          <a:noFill/>
-          <a:ln/>
-        </p:spPr>
-        <p:txBody>
-          <a:bodyPr wrap="square" lIns="0" tIns="0" rIns="0" bIns="0" rtlCol="0" anchor="t"/>
-          <a:lstStyle/>
-          <a:p>
-            <a:pPr indent="0" marL="0">
-              <a:buNone/>
-            </a:pPr>
-            <a:r>
-              <a:rPr lang="en-US" sz="1000" dirty="0">
-                <a:solidFill>
-                  <a:schemeClr val="tx2"/>
-                </a:solidFill>
-              </a:rPr>
-              <a:t>Deployment pipelines review  ·  October 2026</a:t>
-            </a:r>
-            <a:endParaRPr lang="en-US" sz="1000" dirty="0"/>
-          </a:p>
-        </p:txBody>
-      </p:sp>
-      <p:sp>
-        <p:nvSpPr>
-          <p:cNvPr id="5" name="Text 1"/>
-          <p:cNvSpPr/>
-          <p:nvPr>
-            <p:ph idx="103" hasCustomPrompt="1"/>
-          </p:nvPr>
-        </p:nvSpPr>
-        <p:spPr>
-          <a:xfrm>
-            <a:off x="8366760" y="3703320"/>
-            <a:ext cx="3273552" cy="1828800"/>
-          </a:xfrm>
-          <a:prstGeom prst="rect">
-            <a:avLst/>
-          </a:prstGeom>
-          <a:noFill/>
-          <a:ln/>
-        </p:spPr>
-        <p:txBody>
-          <a:bodyPr wrap="square" rtlCol="0"/>
-          <a:lstStyle>
-            <a:lvl1pPr algn="ctr" indent="0" marL="0">
-              <a:buNone/>
-              <a:defRPr lang="en-US" sz="1200" dirty="0">
-                <a:solidFill>
-                  <a:schemeClr val="tx2"/>
-                </a:solidFill>
-              </a:defRPr>
-            </a:lvl1pPr>
-          </a:lstStyle>
-          <a:p>
-            <a:pPr algn="ctr" indent="0" marL="0">
-              <a:buNone/>
-            </a:pPr>
-            <a:r>
-              <a:rPr lang="en-US" sz="1200" dirty="0">
-                <a:solidFill>
-                  <a:schemeClr val="tx2"/>
-                </a:solidFill>
-              </a:rPr>
-              <a:t>PASTE HERE — GitHub › Actions › “Old Pipeline for Firewall Standard Change” › any recent run › crop the single “deploy” job</a:t>
-            </a:r>
-            <a:endParaRPr lang="en-US" sz="1200" dirty="0"/>
-          </a:p>
-        </p:txBody>
-      </p:sp>
-      <p:sp>
-        <p:nvSpPr>
-          <p:cNvPr id="25" name="Slide Number Placeholder 0"/>
-          <p:cNvSpPr>
-            <a:spLocks noGrp="1"/>
-          </p:cNvSpPr>
-          <p:nvPr>
-            <p:ph type="sldNum" sz="quarter" idx="4294967295"/>
-          </p:nvPr>
-        </p:nvSpPr>
-        <p:spPr>
-          <a:xfrm>
-            <a:off x="11000232" y="6473952"/>
-            <a:ext cx="640080" cy="274320"/>
-          </a:xfrm>
-          <a:prstGeom prst="rect">
-            <a:avLst/>
-          </a:prstGeom>
-          <a:extLst>
-            <a:ext uri="{C572A759-6A51-4108-AA02-DFA0A04FC94B}">
-              <ma14:wrappingTextBoxFlag xmlns:ma14="http://schemas.microsoft.com/office/mac/drawingml/2011/main" val="0"/>
-            </a:ext>
-          </a:extLst>
-        </p:spPr>
-        <p:txBody>
-          <a:bodyPr lIns="0" tIns="0" rIns="0" bIns="0"/>
-          <a:lstStyle>
-            <a:lvl1pPr>
-              <a:defRPr sz="1000">
-                <a:solidFill>
-                  <a:schemeClr val="tx2"/>
-                </a:solidFill>
-              </a:defRPr>
-            </a:lvl1pPr>
-          </a:lstStyle>
-          <a:p>
-            <a:pPr algn="r"/>
-            <a:fld id="{F7021451-1387-4CA6-816F-3879F97B5CBC}" type="slidenum">
-              <a:rPr b="0" lang="en-US"/>
-              <a:t>1008</a:t>
-            </a:fld>
-            <a:endParaRPr lang="en-US"/>
-          </a:p>
-        </p:txBody>
-      </p:sp>
-    </p:spTree>
-  </p:cSld>
-  <p:clrMapOvr>
-    <a:masterClrMapping/>
-  </p:clrMapOvr>
-</p:sldLayout>
-</file>
-
-<file path=ppt/slideLayouts/slideLayout9.xml><?xml version="1.0" encoding="utf-8"?>
-<p:sldLayout xmlns:a="http://schemas.openxmlformats.org/drawingml/2006/main" xmlns:r="http://schemas.openxmlformats.org/officeDocument/2006/relationships" xmlns:p="http://schemas.openxmlformats.org/presentationml/2006/main" preserve="1">
-  <p:cSld name="Text and screenshot (AWS docs)">
-    <p:bg>
-      <p:bgPr>
-        <a:solidFill>
-          <a:schemeClr val="bg1"/>
-        </a:solidFill>
-      </p:bgPr>
-    </p:bg>
-    <p:spTree>
-      <p:nvGrpSpPr>
-        <p:cNvPr id="1" name=""/>
-        <p:cNvGrpSpPr/>
-        <p:nvPr/>
-      </p:nvGrpSpPr>
-      <p:grpSpPr>
-        <a:xfrm>
-          <a:off x="0" y="0"/>
-          <a:ext cx="0" cy="0"/>
-          <a:chOff x="0" y="0"/>
-          <a:chExt cx="0" cy="0"/>
-        </a:xfrm>
-      </p:grpSpPr>
-      <p:sp>
-        <p:nvSpPr>
-          <p:cNvPr id="2" name="Text 0"/>
-          <p:cNvSpPr/>
-          <p:nvPr>
-            <p:ph idx="100" type="title" hasCustomPrompt="1"/>
-          </p:nvPr>
-        </p:nvSpPr>
-        <p:spPr>
-          <a:xfrm>
-            <a:off x="548640" y="384048"/>
-            <a:ext cx="9144000" cy="713232"/>
-          </a:xfrm>
-          <a:prstGeom prst="rect">
-            <a:avLst/>
-          </a:prstGeom>
-          <a:noFill/>
-          <a:ln/>
-        </p:spPr>
-        <p:txBody>
-          <a:bodyPr wrap="square" rtlCol="0"/>
-          <a:lstStyle>
-            <a:lvl1pPr algn="l" indent="0" marL="0">
-              <a:buNone/>
-              <a:defRPr lang="en-US" sz="3400" b="1" dirty="0">
-                <a:solidFill>
-                  <a:schemeClr val="tx1"/>
-                </a:solidFill>
-              </a:defRPr>
-            </a:lvl1pPr>
-          </a:lstStyle>
-          <a:p>
-            <a:pPr algn="l" indent="0" marL="0">
-              <a:buNone/>
-            </a:pPr>
-            <a:endParaRPr lang="en-US" sz="3400" dirty="0"/>
-          </a:p>
-        </p:txBody>
-      </p:sp>
-      <p:sp>
-        <p:nvSpPr>
-          <p:cNvPr id="3" name="Text 0"/>
-          <p:cNvSpPr/>
-          <p:nvPr>
-            <p:ph idx="101" type="body" hasCustomPrompt="1"/>
-          </p:nvPr>
-        </p:nvSpPr>
-        <p:spPr>
-          <a:xfrm>
-            <a:off x="548640" y="1097280"/>
-            <a:ext cx="11091672" cy="384048"/>
-          </a:xfrm>
-          <a:prstGeom prst="rect">
-            <a:avLst/>
-          </a:prstGeom>
-          <a:noFill/>
-          <a:ln/>
-        </p:spPr>
-        <p:txBody>
-          <a:bodyPr wrap="square" rtlCol="0"/>
-          <a:lstStyle>
-            <a:lvl1pPr indent="0" marL="0">
-              <a:buNone/>
-              <a:defRPr lang="en-US" sz="1500" dirty="0">
-                <a:solidFill>
-                  <a:schemeClr val="tx2"/>
-                </a:solidFill>
-              </a:defRPr>
-            </a:lvl1pPr>
-          </a:lstStyle>
-          <a:p>
-            <a:pPr indent="0" marL="0">
-              <a:buNone/>
-            </a:pPr>
-            <a:endParaRPr lang="en-US" sz="1500" dirty="0"/>
-          </a:p>
-        </p:txBody>
-      </p:sp>
-      <p:sp>
-        <p:nvSpPr>
-          <p:cNvPr id="4" name="Text 0"/>
-          <p:cNvSpPr/>
-          <p:nvPr/>
-        </p:nvSpPr>
-        <p:spPr>
-          <a:xfrm>
-            <a:off x="548640" y="6473952"/>
-            <a:ext cx="6400800" cy="274320"/>
-          </a:xfrm>
-          <a:prstGeom prst="rect">
-            <a:avLst/>
-          </a:prstGeom>
-          <a:noFill/>
-          <a:ln/>
-        </p:spPr>
-        <p:txBody>
-          <a:bodyPr wrap="square" lIns="0" tIns="0" rIns="0" bIns="0" rtlCol="0" anchor="t"/>
-          <a:lstStyle/>
-          <a:p>
-            <a:pPr indent="0" marL="0">
-              <a:buNone/>
-            </a:pPr>
-            <a:r>
-              <a:rPr lang="en-US" sz="1000" dirty="0">
-                <a:solidFill>
-                  <a:schemeClr val="tx2"/>
-                </a:solidFill>
-              </a:rPr>
-              <a:t>Deployment pipelines review  ·  October 2026</a:t>
-            </a:r>
-            <a:endParaRPr lang="en-US" sz="1000" dirty="0"/>
-          </a:p>
-        </p:txBody>
-      </p:sp>
-      <p:sp>
-        <p:nvSpPr>
-          <p:cNvPr id="5" name="Text 1"/>
-          <p:cNvSpPr/>
-          <p:nvPr>
-            <p:ph idx="103" hasCustomPrompt="1"/>
-          </p:nvPr>
-        </p:nvSpPr>
-        <p:spPr>
-          <a:xfrm>
-            <a:off x="7498080" y="1691640"/>
-            <a:ext cx="4142232" cy="3246120"/>
-          </a:xfrm>
-          <a:prstGeom prst="rect">
-            <a:avLst/>
-          </a:prstGeom>
-          <a:noFill/>
-          <a:ln/>
-        </p:spPr>
-        <p:txBody>
-          <a:bodyPr wrap="square" rtlCol="0"/>
-          <a:lstStyle>
-            <a:lvl1pPr algn="ctr" indent="0" marL="0">
-              <a:buNone/>
-              <a:defRPr lang="en-US" sz="1200" dirty="0">
-                <a:solidFill>
-                  <a:schemeClr val="tx2"/>
-                </a:solidFill>
-              </a:defRPr>
-            </a:lvl1pPr>
-          </a:lstStyle>
-          <a:p>
-            <a:pPr algn="ctr" indent="0" marL="0">
-              <a:buNone/>
-            </a:pPr>
-            <a:r>
-              <a:rPr lang="en-US" sz="1200" dirty="0">
-                <a:solidFill>
-                  <a:schemeClr val="tx2"/>
-                </a:solidFill>
-              </a:rPr>
-              <a:t>PASTE HERE — AWS docs › CloudFormation User Guide › “Resource type support” › Ctrl+F “AWS::FMS::Policy” › crop the table header and that row (Drift detection: No)</a:t>
-            </a:r>
-            <a:endParaRPr lang="en-US" sz="1200" dirty="0"/>
-          </a:p>
-        </p:txBody>
-      </p:sp>
-      <p:sp>
-        <p:nvSpPr>
-          <p:cNvPr id="25" name="Slide Number Placeholder 0"/>
-          <p:cNvSpPr>
-            <a:spLocks noGrp="1"/>
-          </p:cNvSpPr>
-          <p:nvPr>
-            <p:ph type="sldNum" sz="quarter" idx="4294967295"/>
-          </p:nvPr>
-        </p:nvSpPr>
-        <p:spPr>
-          <a:xfrm>
-            <a:off x="11000232" y="6473952"/>
-            <a:ext cx="640080" cy="274320"/>
-          </a:xfrm>
-          <a:prstGeom prst="rect">
-            <a:avLst/>
-          </a:prstGeom>
-          <a:extLst>
-            <a:ext uri="{C572A759-6A51-4108-AA02-DFA0A04FC94B}">
-              <ma14:wrappingTextBoxFlag xmlns:ma14="http://schemas.microsoft.com/office/mac/drawingml/2011/main" val="0"/>
-            </a:ext>
-          </a:extLst>
-        </p:spPr>
-        <p:txBody>
-          <a:bodyPr lIns="0" tIns="0" rIns="0" bIns="0"/>
-          <a:lstStyle>
-            <a:lvl1pPr>
-              <a:defRPr sz="1000">
-                <a:solidFill>
-                  <a:schemeClr val="tx2"/>
-                </a:solidFill>
-              </a:defRPr>
-            </a:lvl1pPr>
-          </a:lstStyle>
-          <a:p>
-            <a:pPr algn="r"/>
-            <a:fld id="{F7021451-1387-4CA6-816F-3879F97B5CBC}" type="slidenum">
-              <a:rPr b="0" lang="en-US"/>
-              <a:t>1009</a:t>
             </a:fld>
             <a:endParaRPr lang="en-US"/>
           </a:p>
@@ -3905,12 +2289,6 @@
     <p:sldLayoutId id="2147483650" r:id="rId2"/>
     <p:sldLayoutId id="2147483651" r:id="rId3"/>
     <p:sldLayoutId id="2147483652" r:id="rId4"/>
-    <p:sldLayoutId id="2147483653" r:id="rId5"/>
-    <p:sldLayoutId id="2147483654" r:id="rId6"/>
-    <p:sldLayoutId id="2147483655" r:id="rId7"/>
-    <p:sldLayoutId id="2147483656" r:id="rId8"/>
-    <p:sldLayoutId id="2147483657" r:id="rId9"/>
-    <p:sldLayoutId id="2147483658" r:id="rId10"/>
   </p:sldLayoutIdLst>
   <p:hf sldNum="0" hdr="0" ftr="0" dt="0"/>
   <p:txStyles>
@@ -4971,54 +3349,54 @@
       </p:sp>
       <p:sp>
         <p:nvSpPr>
-          <p:cNvPr id="8" name="Screenshot frame"/>
+          <p:cNvPr id="8" name="Screenshot panel"/>
           <p:cNvSpPr/>
           <p:nvPr/>
         </p:nvSpPr>
         <p:spPr>
           <a:xfrm>
             <a:off x="731520" y="2331720"/>
-            <a:ext cx="5074920" cy="2468880"/>
+            <a:ext cx="5074920" cy="3017520"/>
           </a:xfrm>
           <a:prstGeom prst="roundRect">
             <a:avLst>
-              <a:gd name="adj" fmla="val 2963"/>
+              <a:gd name="adj" fmla="val 1818"/>
             </a:avLst>
           </a:prstGeom>
           <a:solidFill>
-            <a:schemeClr val="bg2"/>
+            <a:schemeClr val="bg1"/>
           </a:solidFill>
-          <a:ln w="15875">
+          <a:ln/>
+        </p:spPr>
+      </p:sp>
+      <p:sp>
+        <p:nvSpPr>
+          <p:cNvPr id="9" name="Screenshot border"/>
+          <p:cNvSpPr/>
+          <p:nvPr/>
+        </p:nvSpPr>
+        <p:spPr>
+          <a:xfrm>
+            <a:off x="804672" y="2621971"/>
+            <a:ext cx="4928616" cy="2437018"/>
+          </a:xfrm>
+          <a:prstGeom prst="rect">
+            <a:avLst/>
+          </a:prstGeom>
+          <a:solidFill>
+            <a:schemeClr val="bg1"/>
+          </a:solidFill>
+          <a:ln w="9525">
             <a:solidFill>
-              <a:schemeClr val="accent5"/>
+              <a:srgbClr val="C9D1DB"/>
             </a:solidFill>
-            <a:prstDash val="dash"/>
+            <a:prstDash val="solid"/>
           </a:ln>
-        </p:spPr>
-      </p:sp>
-      <p:sp>
-        <p:nvSpPr>
-          <p:cNvPr id="9" name="Shape 6"/>
-          <p:cNvSpPr/>
-          <p:nvPr/>
-        </p:nvSpPr>
-        <p:spPr>
-          <a:xfrm>
-            <a:off x="859536" y="2459736"/>
-            <a:ext cx="365760" cy="365760"/>
-          </a:xfrm>
-          <a:prstGeom prst="ellipse">
-            <a:avLst/>
-          </a:prstGeom>
-          <a:solidFill>
-            <a:schemeClr val="accent5"/>
-          </a:solidFill>
-          <a:ln/>
         </p:spPr>
       </p:sp>
       <p:pic>
         <p:nvPicPr>
-          <p:cNvPr id="10" name="Image 1" descr="preencoded.png">    </p:cNvPr>
+          <p:cNvPr id="10" name="Image 1" descr="WS2 export file">    </p:cNvPr>
           <p:cNvPicPr>
             <a:picLocks noChangeAspect="1"/>
           </p:cNvPicPr>
@@ -5032,8 +3410,8 @@
         </p:blipFill>
         <p:spPr>
           <a:xfrm>
-            <a:off x="940003" y="2540203"/>
-            <a:ext cx="204826" cy="204826"/>
+            <a:off x="822960" y="2640259"/>
+            <a:ext cx="4892040" cy="2400442"/>
           </a:xfrm>
           <a:prstGeom prst="rect">
             <a:avLst/>
@@ -5056,8 +3434,8 @@
         </p:blipFill>
         <p:spPr>
           <a:xfrm>
-            <a:off x="777240" y="4963922"/>
-            <a:ext cx="219456" cy="219456"/>
+            <a:off x="777240" y="5509260"/>
+            <a:ext cx="201168" cy="201168"/>
           </a:xfrm>
           <a:prstGeom prst="rect">
             <a:avLst/>
@@ -5072,8 +3450,8 @@
         </p:nvSpPr>
         <p:spPr>
           <a:xfrm>
-            <a:off x="1124712" y="4956048"/>
-            <a:ext cx="4636008" cy="271780"/>
+            <a:off x="1069848" y="5504688"/>
+            <a:ext cx="2240280" cy="274320"/>
           </a:xfrm>
           <a:prstGeom prst="rect">
             <a:avLst/>
@@ -5089,14 +3467,14 @@
               <a:buNone/>
             </a:pPr>
             <a:r>
-              <a:rPr lang="en-US" sz="1400" dirty="0">
+              <a:rPr lang="en-US" sz="1300" dirty="0">
                 <a:solidFill>
                   <a:schemeClr val="tx1"/>
                 </a:solidFill>
               </a:rPr>
-              <a:t>Ordinary records: A, AAAA, CNAME, MX, TXT and so on</a:t>
-            </a:r>
-            <a:endParaRPr lang="en-US" sz="1400" dirty="0"/>
+              <a:t>Ordinary DNS records</a:t>
+            </a:r>
+            <a:endParaRPr lang="en-US" sz="1300" dirty="0"/>
           </a:p>
         </p:txBody>
       </p:sp>
@@ -5116,8 +3494,8 @@
         </p:blipFill>
         <p:spPr>
           <a:xfrm>
-            <a:off x="777240" y="5290566"/>
-            <a:ext cx="219456" cy="219456"/>
+            <a:off x="3337560" y="5509260"/>
+            <a:ext cx="201168" cy="201168"/>
           </a:xfrm>
           <a:prstGeom prst="rect">
             <a:avLst/>
@@ -5132,8 +3510,8 @@
         </p:nvSpPr>
         <p:spPr>
           <a:xfrm>
-            <a:off x="1124712" y="5282692"/>
-            <a:ext cx="4636008" cy="271780"/>
+            <a:off x="3630168" y="5504688"/>
+            <a:ext cx="2240280" cy="274320"/>
           </a:xfrm>
           <a:prstGeom prst="rect">
             <a:avLst/>
@@ -5149,14 +3527,14 @@
               <a:buNone/>
             </a:pPr>
             <a:r>
-              <a:rPr lang="en-US" sz="1400" dirty="0">
+              <a:rPr lang="en-US" sz="1300" dirty="0">
                 <a:solidFill>
                   <a:schemeClr val="tx1"/>
                 </a:solidFill>
               </a:rPr>
-              <a:t>The hosted zone itself — not defined in the file</a:t>
-            </a:r>
-            <a:endParaRPr lang="en-US" sz="1400" dirty="0"/>
+              <a:t>No hosted zone</a:t>
+            </a:r>
+            <a:endParaRPr lang="en-US" sz="1300" dirty="0"/>
           </a:p>
         </p:txBody>
       </p:sp>
@@ -5176,8 +3554,8 @@
         </p:blipFill>
         <p:spPr>
           <a:xfrm>
-            <a:off x="777240" y="5617210"/>
-            <a:ext cx="219456" cy="219456"/>
+            <a:off x="777240" y="5856732"/>
+            <a:ext cx="201168" cy="201168"/>
           </a:xfrm>
           <a:prstGeom prst="rect">
             <a:avLst/>
@@ -5192,8 +3570,8 @@
         </p:nvSpPr>
         <p:spPr>
           <a:xfrm>
-            <a:off x="1124712" y="5609336"/>
-            <a:ext cx="4636008" cy="271780"/>
+            <a:off x="1069848" y="5852160"/>
+            <a:ext cx="2240280" cy="274320"/>
           </a:xfrm>
           <a:prstGeom prst="rect">
             <a:avLst/>
@@ -5209,14 +3587,14 @@
               <a:buNone/>
             </a:pPr>
             <a:r>
-              <a:rPr lang="en-US" sz="1400" dirty="0">
+              <a:rPr lang="en-US" sz="1300" dirty="0">
                 <a:solidFill>
                   <a:schemeClr val="tx1"/>
                 </a:solidFill>
               </a:rPr>
-              <a:t>SOA and the zone’s own NS records — skipped</a:t>
-            </a:r>
-            <a:endParaRPr lang="en-US" sz="1400" dirty="0"/>
+              <a:t>No SOA or zone NS records</a:t>
+            </a:r>
+            <a:endParaRPr lang="en-US" sz="1300" dirty="0"/>
           </a:p>
         </p:txBody>
       </p:sp>
@@ -5236,8 +3614,8 @@
         </p:blipFill>
         <p:spPr>
           <a:xfrm>
-            <a:off x="777240" y="5943854"/>
-            <a:ext cx="219456" cy="219456"/>
+            <a:off x="3337560" y="5856732"/>
+            <a:ext cx="201168" cy="201168"/>
           </a:xfrm>
           <a:prstGeom prst="rect">
             <a:avLst/>
@@ -5252,8 +3630,8 @@
         </p:nvSpPr>
         <p:spPr>
           <a:xfrm>
-            <a:off x="1124712" y="5935980"/>
-            <a:ext cx="4636008" cy="271780"/>
+            <a:off x="3630168" y="5852160"/>
+            <a:ext cx="2240280" cy="274320"/>
           </a:xfrm>
           <a:prstGeom prst="rect">
             <a:avLst/>
@@ -5269,14 +3647,14 @@
               <a:buNone/>
             </a:pPr>
             <a:r>
-              <a:rPr lang="en-US" sz="1400" dirty="0">
+              <a:rPr lang="en-US" sz="1300" dirty="0">
                 <a:solidFill>
                   <a:schemeClr val="tx1"/>
                 </a:solidFill>
               </a:rPr>
-              <a:t>Alias records (CloudFront, load balancers) — skipped</a:t>
-            </a:r>
-            <a:endParaRPr lang="en-US" sz="1400" dirty="0"/>
+              <a:t>No alias records</a:t>
+            </a:r>
+            <a:endParaRPr lang="en-US" sz="1300" dirty="0"/>
           </a:p>
         </p:txBody>
       </p:sp>
@@ -5397,54 +3775,54 @@
       </p:sp>
       <p:sp>
         <p:nvSpPr>
-          <p:cNvPr id="23" name="Screenshot frame"/>
+          <p:cNvPr id="23" name="Screenshot panel"/>
           <p:cNvSpPr/>
           <p:nvPr/>
         </p:nvSpPr>
         <p:spPr>
           <a:xfrm>
             <a:off x="6382512" y="2331720"/>
-            <a:ext cx="5074920" cy="2468880"/>
+            <a:ext cx="5074920" cy="3017520"/>
           </a:xfrm>
           <a:prstGeom prst="roundRect">
             <a:avLst>
-              <a:gd name="adj" fmla="val 2963"/>
+              <a:gd name="adj" fmla="val 1818"/>
             </a:avLst>
           </a:prstGeom>
           <a:solidFill>
-            <a:schemeClr val="bg2"/>
+            <a:schemeClr val="bg1"/>
           </a:solidFill>
-          <a:ln w="15875">
+          <a:ln/>
+        </p:spPr>
+      </p:sp>
+      <p:sp>
+        <p:nvSpPr>
+          <p:cNvPr id="24" name="Screenshot border"/>
+          <p:cNvSpPr/>
+          <p:nvPr/>
+        </p:nvSpPr>
+        <p:spPr>
+          <a:xfrm>
+            <a:off x="6645088" y="2404872"/>
+            <a:ext cx="4549768" cy="2871216"/>
+          </a:xfrm>
+          <a:prstGeom prst="rect">
+            <a:avLst/>
+          </a:prstGeom>
+          <a:solidFill>
+            <a:schemeClr val="bg1"/>
+          </a:solidFill>
+          <a:ln w="9525">
             <a:solidFill>
-              <a:schemeClr val="accent5"/>
+              <a:srgbClr val="C9D1DB"/>
             </a:solidFill>
-            <a:prstDash val="dash"/>
+            <a:prstDash val="solid"/>
           </a:ln>
-        </p:spPr>
-      </p:sp>
-      <p:sp>
-        <p:nvSpPr>
-          <p:cNvPr id="24" name="Shape 15"/>
-          <p:cNvSpPr/>
-          <p:nvPr/>
-        </p:nvSpPr>
-        <p:spPr>
-          <a:xfrm>
-            <a:off x="6510528" y="2459736"/>
-            <a:ext cx="365760" cy="365760"/>
-          </a:xfrm>
-          <a:prstGeom prst="ellipse">
-            <a:avLst/>
-          </a:prstGeom>
-          <a:solidFill>
-            <a:schemeClr val="accent5"/>
-          </a:solidFill>
-          <a:ln/>
         </p:spPr>
       </p:sp>
       <p:pic>
         <p:nvPicPr>
-          <p:cNvPr id="25" name="Image 7" descr="preencoded.png">    </p:cNvPr>
+          <p:cNvPr id="25" name="Image 7" descr="New pipeline file">    </p:cNvPr>
           <p:cNvPicPr>
             <a:picLocks noChangeAspect="1"/>
           </p:cNvPicPr>
@@ -5458,8 +3836,8 @@
         </p:blipFill>
         <p:spPr>
           <a:xfrm>
-            <a:off x="6590995" y="2540203"/>
-            <a:ext cx="204826" cy="204826"/>
+            <a:off x="6663376" y="2423160"/>
+            <a:ext cx="4513192" cy="2834640"/>
           </a:xfrm>
           <a:prstGeom prst="rect">
             <a:avLst/>
@@ -5482,8 +3860,8 @@
         </p:blipFill>
         <p:spPr>
           <a:xfrm>
-            <a:off x="6428232" y="4963922"/>
-            <a:ext cx="219456" cy="219456"/>
+            <a:off x="6428232" y="5509260"/>
+            <a:ext cx="201168" cy="201168"/>
           </a:xfrm>
           <a:prstGeom prst="rect">
             <a:avLst/>
@@ -5498,8 +3876,8 @@
         </p:nvSpPr>
         <p:spPr>
           <a:xfrm>
-            <a:off x="6775704" y="4956048"/>
-            <a:ext cx="4636008" cy="271780"/>
+            <a:off x="6720840" y="5504688"/>
+            <a:ext cx="2240280" cy="274320"/>
           </a:xfrm>
           <a:prstGeom prst="rect">
             <a:avLst/>
@@ -5515,14 +3893,14 @@
               <a:buNone/>
             </a:pPr>
             <a:r>
-              <a:rPr lang="en-US" sz="1400" dirty="0">
+              <a:rPr lang="en-US" sz="1300" dirty="0">
                 <a:solidFill>
                   <a:schemeClr val="tx1"/>
                 </a:solidFill>
               </a:rPr>
-              <a:t>The hosted zone itself — its SOA and NS come with it</a:t>
-            </a:r>
-            <a:endParaRPr lang="en-US" sz="1400" dirty="0"/>
+              <a:t>The hosted zone itself</a:t>
+            </a:r>
+            <a:endParaRPr lang="en-US" sz="1300" dirty="0"/>
           </a:p>
         </p:txBody>
       </p:sp>
@@ -5542,8 +3920,8 @@
         </p:blipFill>
         <p:spPr>
           <a:xfrm>
-            <a:off x="6428232" y="5290566"/>
-            <a:ext cx="219456" cy="219456"/>
+            <a:off x="8988552" y="5509260"/>
+            <a:ext cx="201168" cy="201168"/>
           </a:xfrm>
           <a:prstGeom prst="rect">
             <a:avLst/>
@@ -5558,8 +3936,8 @@
         </p:nvSpPr>
         <p:spPr>
           <a:xfrm>
-            <a:off x="6775704" y="5282692"/>
-            <a:ext cx="4636008" cy="271780"/>
+            <a:off x="9281160" y="5504688"/>
+            <a:ext cx="2240280" cy="274320"/>
           </a:xfrm>
           <a:prstGeom prst="rect">
             <a:avLst/>
@@ -5575,14 +3953,14 @@
               <a:buNone/>
             </a:pPr>
             <a:r>
-              <a:rPr lang="en-US" sz="1400" dirty="0">
+              <a:rPr lang="en-US" sz="1300" dirty="0">
                 <a:solidFill>
                   <a:schemeClr val="tx1"/>
                 </a:solidFill>
               </a:rPr>
-              <a:t>Every record, each as its own resource</a:t>
-            </a:r>
-            <a:endParaRPr lang="en-US" sz="1400" dirty="0"/>
+              <a:t>Every record set</a:t>
+            </a:r>
+            <a:endParaRPr lang="en-US" sz="1300" dirty="0"/>
           </a:p>
         </p:txBody>
       </p:sp>
@@ -5602,8 +3980,8 @@
         </p:blipFill>
         <p:spPr>
           <a:xfrm>
-            <a:off x="6428232" y="5617210"/>
-            <a:ext cx="219456" cy="219456"/>
+            <a:off x="6428232" y="5856732"/>
+            <a:ext cx="201168" cy="201168"/>
           </a:xfrm>
           <a:prstGeom prst="rect">
             <a:avLst/>
@@ -5618,8 +3996,8 @@
         </p:nvSpPr>
         <p:spPr>
           <a:xfrm>
-            <a:off x="6775704" y="5609336"/>
-            <a:ext cx="4636008" cy="271780"/>
+            <a:off x="6720840" y="5852160"/>
+            <a:ext cx="2240280" cy="274320"/>
           </a:xfrm>
           <a:prstGeom prst="rect">
             <a:avLst/>
@@ -5635,14 +4013,14 @@
               <a:buNone/>
             </a:pPr>
             <a:r>
-              <a:rPr lang="en-US" sz="1400" dirty="0">
+              <a:rPr lang="en-US" sz="1300" dirty="0">
                 <a:solidFill>
                   <a:schemeClr val="tx1"/>
                 </a:solidFill>
               </a:rPr>
-              <a:t>Alias records too (CloudFront, load balancers)</a:t>
-            </a:r>
-            <a:endParaRPr lang="en-US" sz="1400" dirty="0"/>
+              <a:t>Alias records too</a:t>
+            </a:r>
+            <a:endParaRPr lang="en-US" sz="1300" dirty="0"/>
           </a:p>
         </p:txBody>
       </p:sp>
@@ -5662,8 +4040,8 @@
         </p:blipFill>
         <p:spPr>
           <a:xfrm>
-            <a:off x="6428232" y="5943854"/>
-            <a:ext cx="219456" cy="219456"/>
+            <a:off x="8988552" y="5856732"/>
+            <a:ext cx="201168" cy="201168"/>
           </a:xfrm>
           <a:prstGeom prst="rect">
             <a:avLst/>
@@ -5678,8 +4056,8 @@
         </p:nvSpPr>
         <p:spPr>
           <a:xfrm>
-            <a:off x="6775704" y="5935980"/>
-            <a:ext cx="4636008" cy="271780"/>
+            <a:off x="9281160" y="5852160"/>
+            <a:ext cx="2240280" cy="274320"/>
           </a:xfrm>
           <a:prstGeom prst="rect">
             <a:avLst/>
@@ -5695,74 +4073,14 @@
               <a:buNone/>
             </a:pPr>
             <a:r>
-              <a:rPr lang="en-US" sz="1400" dirty="0">
+              <a:rPr lang="en-US" sz="1300" dirty="0">
                 <a:solidFill>
                   <a:schemeClr val="tx1"/>
                 </a:solidFill>
               </a:rPr>
-              <a:t>One stack per zone: the zone and its records together</a:t>
-            </a:r>
-            <a:endParaRPr lang="en-US" sz="1400" dirty="0"/>
-          </a:p>
-        </p:txBody>
-      </p:sp>
-      <p:sp>
-        <p:nvSpPr>
-          <p:cNvPr id="35" name="Text 1"/>
-          <p:cNvSpPr/>
-          <p:nvPr>
-            <p:ph idx="103" hasCustomPrompt="1"/>
-          </p:nvPr>
-        </p:nvSpPr>
-        <p:spPr>
-          <a:xfrm>
-            <a:off x="731520" y="2331720"/>
-            <a:ext cx="5074920" cy="2468880"/>
-          </a:xfrm>
-          <a:prstGeom prst="rect">
-            <a:avLst/>
-          </a:prstGeom>
-          <a:noFill/>
-          <a:ln/>
-        </p:spPr>
-        <p:txBody>
-          <a:bodyPr wrap="square" lIns="558800" tIns="50800" rIns="558800" bIns="50800" rtlCol="0" anchor="ctr"/>
-          <a:lstStyle/>
-          <a:p>
-            <a:pPr algn="ctr" indent="0" marL="0">
-              <a:buNone/>
-            </a:pPr>
-            <a:endParaRPr lang="en-US" sz="1200" dirty="0"/>
-          </a:p>
-        </p:txBody>
-      </p:sp>
-      <p:sp>
-        <p:nvSpPr>
-          <p:cNvPr id="36" name="Text 1"/>
-          <p:cNvSpPr/>
-          <p:nvPr>
-            <p:ph idx="104" hasCustomPrompt="1"/>
-          </p:nvPr>
-        </p:nvSpPr>
-        <p:spPr>
-          <a:xfrm>
-            <a:off x="6382512" y="2331720"/>
-            <a:ext cx="5074920" cy="2468880"/>
-          </a:xfrm>
-          <a:prstGeom prst="rect">
-            <a:avLst/>
-          </a:prstGeom>
-          <a:noFill/>
-          <a:ln/>
-        </p:spPr>
-        <p:txBody>
-          <a:bodyPr wrap="square" lIns="558800" tIns="50800" rIns="558800" bIns="50800" rtlCol="0" anchor="ctr"/>
-          <a:lstStyle/>
-          <a:p>
-            <a:pPr algn="ctr" indent="0" marL="0">
-              <a:buNone/>
-            </a:pPr>
-            <a:endParaRPr lang="en-US" sz="1200" dirty="0"/>
+              <a:t>SOA and NS come with the zone</a:t>
+            </a:r>
+            <a:endParaRPr lang="en-US" sz="1300" dirty="0"/>
           </a:p>
         </p:txBody>
       </p:sp>
@@ -7490,7 +5808,7 @@
       </p:sp>
       <p:sp>
         <p:nvSpPr>
-          <p:cNvPr id="59" name="Screenshot frame"/>
+          <p:cNvPr id="59" name="Screenshot panel"/>
           <p:cNvSpPr/>
           <p:nvPr/>
         </p:nvSpPr>
@@ -7507,37 +5825,37 @@
           <a:solidFill>
             <a:schemeClr val="bg2"/>
           </a:solidFill>
-          <a:ln w="15875">
+          <a:ln/>
+        </p:spPr>
+      </p:sp>
+      <p:sp>
+        <p:nvSpPr>
+          <p:cNvPr id="60" name="Screenshot border"/>
+          <p:cNvSpPr/>
+          <p:nvPr/>
+        </p:nvSpPr>
+        <p:spPr>
+          <a:xfrm>
+            <a:off x="8474941" y="3794760"/>
+            <a:ext cx="3057191" cy="1645920"/>
+          </a:xfrm>
+          <a:prstGeom prst="rect">
+            <a:avLst/>
+          </a:prstGeom>
+          <a:solidFill>
+            <a:schemeClr val="bg1"/>
+          </a:solidFill>
+          <a:ln w="9525">
             <a:solidFill>
-              <a:schemeClr val="accent5"/>
+              <a:srgbClr val="C9D1DB"/>
             </a:solidFill>
-            <a:prstDash val="dash"/>
+            <a:prstDash val="solid"/>
           </a:ln>
-        </p:spPr>
-      </p:sp>
-      <p:sp>
-        <p:nvSpPr>
-          <p:cNvPr id="60" name="Shape 43"/>
-          <p:cNvSpPr/>
-          <p:nvPr/>
-        </p:nvSpPr>
-        <p:spPr>
-          <a:xfrm>
-            <a:off x="8494776" y="3831336"/>
-            <a:ext cx="365760" cy="365760"/>
-          </a:xfrm>
-          <a:prstGeom prst="ellipse">
-            <a:avLst/>
-          </a:prstGeom>
-          <a:solidFill>
-            <a:schemeClr val="accent5"/>
-          </a:solidFill>
-          <a:ln/>
         </p:spPr>
       </p:sp>
       <p:pic>
         <p:nvPicPr>
-          <p:cNvPr id="61" name="Image 15" descr="preencoded.png">    </p:cNvPr>
+          <p:cNvPr id="61" name="Image 15" descr="One-job run">    </p:cNvPr>
           <p:cNvPicPr>
             <a:picLocks noChangeAspect="1"/>
           </p:cNvPicPr>
@@ -7551,8 +5869,8 @@
         </p:blipFill>
         <p:spPr>
           <a:xfrm>
-            <a:off x="8575243" y="3911803"/>
-            <a:ext cx="204826" cy="204826"/>
+            <a:off x="8493229" y="3813048"/>
+            <a:ext cx="3020615" cy="1609344"/>
           </a:xfrm>
           <a:prstGeom prst="rect">
             <a:avLst/>
@@ -7589,7 +5907,7 @@
                   <a:schemeClr val="tx1"/>
                 </a:solidFill>
               </a:rPr>
-              <a:t>Old pipeline run</a:t>
+              <a:t>One-job run</a:t>
             </a:r>
             <a:pPr indent="0" marL="0">
               <a:buNone/>
@@ -7600,39 +5918,9 @@
                   <a:schemeClr val="tx2"/>
                 </a:solidFill>
               </a:rPr>
-              <a:t>  one ‘deploy’ job — compare with the four stages</a:t>
+              <a:t>  the earlier CloudFormation pipeline: a single ‘deploy’ job, straight to AWS</a:t>
             </a:r>
             <a:endParaRPr lang="en-US" sz="1400" dirty="0"/>
-          </a:p>
-        </p:txBody>
-      </p:sp>
-      <p:sp>
-        <p:nvSpPr>
-          <p:cNvPr id="64" name="Text 1"/>
-          <p:cNvSpPr/>
-          <p:nvPr>
-            <p:ph idx="103" hasCustomPrompt="1"/>
-          </p:nvPr>
-        </p:nvSpPr>
-        <p:spPr>
-          <a:xfrm>
-            <a:off x="8366760" y="3703320"/>
-            <a:ext cx="3273552" cy="1828800"/>
-          </a:xfrm>
-          <a:prstGeom prst="rect">
-            <a:avLst/>
-          </a:prstGeom>
-          <a:noFill/>
-          <a:ln/>
-        </p:spPr>
-        <p:txBody>
-          <a:bodyPr wrap="square" lIns="558800" tIns="50800" rIns="558800" bIns="50800" rtlCol="0" anchor="ctr"/>
-          <a:lstStyle/>
-          <a:p>
-            <a:pPr algn="ctr" indent="0" marL="0">
-              <a:buNone/>
-            </a:pPr>
-            <a:endParaRPr lang="en-US" sz="1200" dirty="0"/>
           </a:p>
         </p:txBody>
       </p:sp>
@@ -8412,54 +6700,54 @@
       </p:sp>
       <p:sp>
         <p:nvSpPr>
-          <p:cNvPr id="24" name="Screenshot frame"/>
+          <p:cNvPr id="24" name="Screenshot panel"/>
           <p:cNvSpPr/>
           <p:nvPr/>
         </p:nvSpPr>
         <p:spPr>
           <a:xfrm>
             <a:off x="7498080" y="1691640"/>
-            <a:ext cx="4142232" cy="3246120"/>
+            <a:ext cx="4142232" cy="2395728"/>
           </a:xfrm>
           <a:prstGeom prst="roundRect">
             <a:avLst>
-              <a:gd name="adj" fmla="val 2254"/>
+              <a:gd name="adj" fmla="val 3053"/>
             </a:avLst>
           </a:prstGeom>
           <a:solidFill>
             <a:schemeClr val="bg2"/>
           </a:solidFill>
-          <a:ln w="15875">
+          <a:ln/>
+        </p:spPr>
+      </p:sp>
+      <p:sp>
+        <p:nvSpPr>
+          <p:cNvPr id="25" name="Screenshot border"/>
+          <p:cNvSpPr/>
+          <p:nvPr/>
+        </p:nvSpPr>
+        <p:spPr>
+          <a:xfrm>
+            <a:off x="7589520" y="1783080"/>
+            <a:ext cx="3959352" cy="790956"/>
+          </a:xfrm>
+          <a:prstGeom prst="rect">
+            <a:avLst/>
+          </a:prstGeom>
+          <a:solidFill>
+            <a:schemeClr val="bg1"/>
+          </a:solidFill>
+          <a:ln w="9525">
             <a:solidFill>
-              <a:schemeClr val="accent5"/>
+              <a:srgbClr val="C9D1DB"/>
             </a:solidFill>
-            <a:prstDash val="dash"/>
+            <a:prstDash val="solid"/>
           </a:ln>
-        </p:spPr>
-      </p:sp>
-      <p:sp>
-        <p:nvSpPr>
-          <p:cNvPr id="25" name="Shape 19"/>
-          <p:cNvSpPr/>
-          <p:nvPr/>
-        </p:nvSpPr>
-        <p:spPr>
-          <a:xfrm>
-            <a:off x="7626096" y="1819656"/>
-            <a:ext cx="365760" cy="365760"/>
-          </a:xfrm>
-          <a:prstGeom prst="ellipse">
-            <a:avLst/>
-          </a:prstGeom>
-          <a:solidFill>
-            <a:schemeClr val="accent5"/>
-          </a:solidFill>
-          <a:ln/>
         </p:spPr>
       </p:sp>
       <p:pic>
         <p:nvPicPr>
-          <p:cNvPr id="26" name="Image 4" descr="preencoded.png">    </p:cNvPr>
+          <p:cNvPr id="26" name="Image 4" descr="AWS documentation: Resource type support page">    </p:cNvPr>
           <p:cNvPicPr>
             <a:picLocks noChangeAspect="1"/>
           </p:cNvPicPr>
@@ -8473,8 +6761,8 @@
         </p:blipFill>
         <p:spPr>
           <a:xfrm>
-            <a:off x="7706563" y="1900123"/>
-            <a:ext cx="204826" cy="204826"/>
+            <a:off x="7607808" y="1801368"/>
+            <a:ext cx="3922776" cy="754380"/>
           </a:xfrm>
           <a:prstGeom prst="rect">
             <a:avLst/>
@@ -8483,13 +6771,98 @@
       </p:pic>
       <p:sp>
         <p:nvSpPr>
-          <p:cNvPr id="27" name="Text 20"/>
+          <p:cNvPr id="27" name="Screenshot border"/>
+          <p:cNvSpPr/>
+          <p:nvPr/>
+        </p:nvSpPr>
+        <p:spPr>
+          <a:xfrm>
+            <a:off x="7589520" y="2665476"/>
+            <a:ext cx="3959352" cy="895409"/>
+          </a:xfrm>
+          <a:prstGeom prst="rect">
+            <a:avLst/>
+          </a:prstGeom>
+          <a:solidFill>
+            <a:schemeClr val="bg1"/>
+          </a:solidFill>
+          <a:ln w="9525">
+            <a:solidFill>
+              <a:srgbClr val="C9D1DB"/>
+            </a:solidFill>
+            <a:prstDash val="solid"/>
+          </a:ln>
+        </p:spPr>
+      </p:sp>
+      <p:pic>
+        <p:nvPicPr>
+          <p:cNvPr id="28" name="Image 5" descr="Resource type support table: AWS::FMS::Policy, Drift detection No">    </p:cNvPr>
+          <p:cNvPicPr>
+            <a:picLocks noChangeAspect="1"/>
+          </p:cNvPicPr>
+          <p:nvPr/>
+        </p:nvPicPr>
+        <p:blipFill>
+          <a:blip r:embed="rId6"/>
+          <a:stretch>
+            <a:fillRect/>
+          </a:stretch>
+        </p:blipFill>
+        <p:spPr>
+          <a:xfrm>
+            <a:off x="7607808" y="2683764"/>
+            <a:ext cx="3922776" cy="858833"/>
+          </a:xfrm>
+          <a:prstGeom prst="rect">
+            <a:avLst/>
+          </a:prstGeom>
+        </p:spPr>
+      </p:pic>
+      <p:sp>
+        <p:nvSpPr>
+          <p:cNvPr id="29" name="Text 21"/>
           <p:cNvSpPr txBox="1"/>
           <p:nvPr/>
         </p:nvSpPr>
         <p:spPr>
           <a:xfrm>
-            <a:off x="7498080" y="5010912"/>
+            <a:off x="7607808" y="3588317"/>
+            <a:ext cx="3922776" cy="237744"/>
+          </a:xfrm>
+          <a:prstGeom prst="rect">
+            <a:avLst/>
+          </a:prstGeom>
+          <a:noFill/>
+          <a:ln/>
+        </p:spPr>
+        <p:txBody>
+          <a:bodyPr wrap="square" lIns="0" tIns="0" rIns="0" bIns="0" rtlCol="0" anchor="t"/>
+          <a:lstStyle/>
+          <a:p>
+            <a:pPr algn="ctr" indent="0" marL="0">
+              <a:buNone/>
+            </a:pPr>
+            <a:r>
+              <a:rPr lang="en-US" sz="1100" i="1" dirty="0">
+                <a:solidFill>
+                  <a:schemeClr val="tx2"/>
+                </a:solidFill>
+              </a:rPr>
+              <a:t>Columns: Resource import · Drift detection · IaC generator</a:t>
+            </a:r>
+            <a:endParaRPr lang="en-US" sz="1100" dirty="0"/>
+          </a:p>
+        </p:txBody>
+      </p:sp>
+      <p:sp>
+        <p:nvSpPr>
+          <p:cNvPr id="30" name="Text 22"/>
+          <p:cNvSpPr txBox="1"/>
+          <p:nvPr/>
+        </p:nvSpPr>
+        <p:spPr>
+          <a:xfrm>
+            <a:off x="7498080" y="4160520"/>
             <a:ext cx="4142232" cy="548640"/>
           </a:xfrm>
           <a:prstGeom prst="rect">
@@ -8530,13 +6903,13 @@
       </p:sp>
       <p:sp>
         <p:nvSpPr>
-          <p:cNvPr id="28" name="Text 21"/>
+          <p:cNvPr id="31" name="Text 23"/>
           <p:cNvSpPr txBox="1"/>
           <p:nvPr/>
         </p:nvSpPr>
         <p:spPr>
           <a:xfrm>
-            <a:off x="7498080" y="5577840"/>
+            <a:off x="7498080" y="4800600"/>
             <a:ext cx="4142232" cy="457200"/>
           </a:xfrm>
           <a:prstGeom prst="rect">
@@ -8561,36 +6934,6 @@
               <a:t>Source: AWS CloudFormation User Guide › Resource type support (checked 24 Oct 2026)</a:t>
             </a:r>
             <a:endParaRPr lang="en-US" sz="1100" dirty="0"/>
-          </a:p>
-        </p:txBody>
-      </p:sp>
-      <p:sp>
-        <p:nvSpPr>
-          <p:cNvPr id="30" name="Text 1"/>
-          <p:cNvSpPr/>
-          <p:nvPr>
-            <p:ph idx="103" hasCustomPrompt="1"/>
-          </p:nvPr>
-        </p:nvSpPr>
-        <p:spPr>
-          <a:xfrm>
-            <a:off x="7498080" y="1691640"/>
-            <a:ext cx="4142232" cy="3246120"/>
-          </a:xfrm>
-          <a:prstGeom prst="rect">
-            <a:avLst/>
-          </a:prstGeom>
-          <a:noFill/>
-          <a:ln/>
-        </p:spPr>
-        <p:txBody>
-          <a:bodyPr wrap="square" lIns="558800" tIns="50800" rIns="558800" bIns="50800" rtlCol="0" anchor="ctr"/>
-          <a:lstStyle/>
-          <a:p>
-            <a:pPr algn="ctr" indent="0" marL="0">
-              <a:buNone/>
-            </a:pPr>
-            <a:endParaRPr lang="en-US" sz="1200" dirty="0"/>
           </a:p>
         </p:txBody>
       </p:sp>
@@ -13752,7 +12095,7 @@
                   <a:schemeClr val="tx2"/>
                 </a:solidFill>
               </a:rPr>
-              <a:t>Screenshots from a real run in sandbox</a:t>
+              <a:t>Screenshots from real runs</a:t>
             </a:r>
             <a:endParaRPr lang="en-US" sz="1500" dirty="0"/>
           </a:p>
@@ -13800,7 +12143,7 @@
       </p:sp>
       <p:sp>
         <p:nvSpPr>
-          <p:cNvPr id="5" name="Screenshot frame"/>
+          <p:cNvPr id="5" name="Screenshot panel"/>
           <p:cNvSpPr/>
           <p:nvPr/>
         </p:nvSpPr>
@@ -13817,37 +12160,37 @@
           <a:solidFill>
             <a:schemeClr val="bg2"/>
           </a:solidFill>
-          <a:ln w="15875">
+          <a:ln/>
+        </p:spPr>
+      </p:sp>
+      <p:sp>
+        <p:nvSpPr>
+          <p:cNvPr id="6" name="Screenshot border"/>
+          <p:cNvSpPr/>
+          <p:nvPr/>
+        </p:nvSpPr>
+        <p:spPr>
+          <a:xfrm>
+            <a:off x="640080" y="1814811"/>
+            <a:ext cx="5257800" cy="1353857"/>
+          </a:xfrm>
+          <a:prstGeom prst="rect">
+            <a:avLst/>
+          </a:prstGeom>
+          <a:solidFill>
+            <a:schemeClr val="bg1"/>
+          </a:solidFill>
+          <a:ln w="9525">
             <a:solidFill>
-              <a:schemeClr val="accent5"/>
+              <a:srgbClr val="C9D1DB"/>
             </a:solidFill>
-            <a:prstDash val="dash"/>
+            <a:prstDash val="solid"/>
           </a:ln>
-        </p:spPr>
-      </p:sp>
-      <p:sp>
-        <p:nvSpPr>
-          <p:cNvPr id="6" name="Shape 4"/>
-          <p:cNvSpPr/>
-          <p:nvPr/>
-        </p:nvSpPr>
-        <p:spPr>
-          <a:xfrm>
-            <a:off x="676656" y="1773936"/>
-            <a:ext cx="365760" cy="365760"/>
-          </a:xfrm>
-          <a:prstGeom prst="ellipse">
-            <a:avLst/>
-          </a:prstGeom>
-          <a:solidFill>
-            <a:schemeClr val="accent5"/>
-          </a:solidFill>
-          <a:ln/>
         </p:spPr>
       </p:sp>
       <p:pic>
         <p:nvPicPr>
-          <p:cNvPr id="7" name="Image 0" descr="preencoded.png">    </p:cNvPr>
+          <p:cNvPr id="7" name="Image 0" descr="1 · The run page">    </p:cNvPr>
           <p:cNvPicPr>
             <a:picLocks noChangeAspect="1"/>
           </p:cNvPicPr>
@@ -13861,8 +12204,8 @@
         </p:blipFill>
         <p:spPr>
           <a:xfrm>
-            <a:off x="757123" y="1854403"/>
-            <a:ext cx="204826" cy="204826"/>
+            <a:off x="658368" y="1833099"/>
+            <a:ext cx="5221224" cy="1317281"/>
           </a:xfrm>
           <a:prstGeom prst="rect">
             <a:avLst/>
@@ -13910,7 +12253,7 @@
                   <a:schemeClr val="tx2"/>
                 </a:solidFill>
               </a:rPr>
-              <a:t>  GitHub Actions run with the four stage boxes: Prepare → Drift check → Change set → Deploy</a:t>
+              <a:t>  Prepare → Drift check → Change set; Deploy (grey) waits until someone decides</a:t>
             </a:r>
             <a:endParaRPr lang="en-US" sz="1400" dirty="0"/>
           </a:p>
@@ -13918,7 +12261,7 @@
       </p:sp>
       <p:sp>
         <p:nvSpPr>
-          <p:cNvPr id="9" name="Screenshot frame"/>
+          <p:cNvPr id="9" name="Screenshot panel"/>
           <p:cNvSpPr/>
           <p:nvPr/>
         </p:nvSpPr>
@@ -13935,37 +12278,37 @@
           <a:solidFill>
             <a:schemeClr val="bg2"/>
           </a:solidFill>
-          <a:ln w="15875">
+          <a:ln/>
+        </p:spPr>
+      </p:sp>
+      <p:sp>
+        <p:nvSpPr>
+          <p:cNvPr id="10" name="Screenshot border"/>
+          <p:cNvSpPr/>
+          <p:nvPr/>
+        </p:nvSpPr>
+        <p:spPr>
+          <a:xfrm>
+            <a:off x="6924416" y="1737360"/>
+            <a:ext cx="3991113" cy="1508760"/>
+          </a:xfrm>
+          <a:prstGeom prst="rect">
+            <a:avLst/>
+          </a:prstGeom>
+          <a:solidFill>
+            <a:schemeClr val="bg1"/>
+          </a:solidFill>
+          <a:ln w="9525">
             <a:solidFill>
-              <a:schemeClr val="accent5"/>
+              <a:srgbClr val="C9D1DB"/>
             </a:solidFill>
-            <a:prstDash val="dash"/>
+            <a:prstDash val="solid"/>
           </a:ln>
-        </p:spPr>
-      </p:sp>
-      <p:sp>
-        <p:nvSpPr>
-          <p:cNvPr id="10" name="Shape 7"/>
-          <p:cNvSpPr/>
-          <p:nvPr/>
-        </p:nvSpPr>
-        <p:spPr>
-          <a:xfrm>
-            <a:off x="6327648" y="1773936"/>
-            <a:ext cx="365760" cy="365760"/>
-          </a:xfrm>
-          <a:prstGeom prst="ellipse">
-            <a:avLst/>
-          </a:prstGeom>
-          <a:solidFill>
-            <a:schemeClr val="accent5"/>
-          </a:solidFill>
-          <a:ln/>
         </p:spPr>
       </p:sp>
       <p:pic>
         <p:nvPicPr>
-          <p:cNvPr id="11" name="Image 1" descr="preencoded.png">    </p:cNvPr>
+          <p:cNvPr id="11" name="Image 1" descr="2 · Drift found">    </p:cNvPr>
           <p:cNvPicPr>
             <a:picLocks noChangeAspect="1"/>
           </p:cNvPicPr>
@@ -13979,8 +12322,8 @@
         </p:blipFill>
         <p:spPr>
           <a:xfrm>
-            <a:off x="6408115" y="1854403"/>
-            <a:ext cx="204826" cy="204826"/>
+            <a:off x="6942704" y="1755648"/>
+            <a:ext cx="3954537" cy="1472184"/>
           </a:xfrm>
           <a:prstGeom prst="rect">
             <a:avLst/>
@@ -14017,7 +12360,7 @@
                   <a:schemeClr val="tx1"/>
                 </a:solidFill>
               </a:rPr>
-              <a:t>2 · Drift caught</a:t>
+              <a:t>2 · Drift found</a:t>
             </a:r>
             <a:pPr indent="0" marL="0">
               <a:buNone/>
@@ -14028,7 +12371,7 @@
                   <a:schemeClr val="tx2"/>
                 </a:solidFill>
               </a:rPr>
-              <a:t>  A run stopped by a hand-made change, showing expected vs actual</a:t>
+              <a:t>  the run stops before the change set and shows what differs</a:t>
             </a:r>
             <a:endParaRPr lang="en-US" sz="1400" dirty="0"/>
           </a:p>
@@ -14036,7 +12379,7 @@
       </p:sp>
       <p:sp>
         <p:nvSpPr>
-          <p:cNvPr id="13" name="Screenshot frame"/>
+          <p:cNvPr id="13" name="Screenshot panel"/>
           <p:cNvSpPr/>
           <p:nvPr/>
         </p:nvSpPr>
@@ -14053,37 +12396,37 @@
           <a:solidFill>
             <a:schemeClr val="bg2"/>
           </a:solidFill>
-          <a:ln w="15875">
+          <a:ln/>
+        </p:spPr>
+      </p:sp>
+      <p:sp>
+        <p:nvSpPr>
+          <p:cNvPr id="14" name="Screenshot border"/>
+          <p:cNvSpPr/>
+          <p:nvPr/>
+        </p:nvSpPr>
+        <p:spPr>
+          <a:xfrm>
+            <a:off x="640080" y="4144195"/>
+            <a:ext cx="5257800" cy="1486546"/>
+          </a:xfrm>
+          <a:prstGeom prst="rect">
+            <a:avLst/>
+          </a:prstGeom>
+          <a:solidFill>
+            <a:schemeClr val="bg1"/>
+          </a:solidFill>
+          <a:ln w="9525">
             <a:solidFill>
-              <a:schemeClr val="accent5"/>
+              <a:srgbClr val="C9D1DB"/>
             </a:solidFill>
-            <a:prstDash val="dash"/>
+            <a:prstDash val="solid"/>
           </a:ln>
-        </p:spPr>
-      </p:sp>
-      <p:sp>
-        <p:nvSpPr>
-          <p:cNvPr id="14" name="Shape 10"/>
-          <p:cNvSpPr/>
-          <p:nvPr/>
-        </p:nvSpPr>
-        <p:spPr>
-          <a:xfrm>
-            <a:off x="676656" y="4169664"/>
-            <a:ext cx="365760" cy="365760"/>
-          </a:xfrm>
-          <a:prstGeom prst="ellipse">
-            <a:avLst/>
-          </a:prstGeom>
-          <a:solidFill>
-            <a:schemeClr val="accent5"/>
-          </a:solidFill>
-          <a:ln/>
         </p:spPr>
       </p:sp>
       <p:pic>
         <p:nvPicPr>
-          <p:cNvPr id="15" name="Image 2" descr="preencoded.png">    </p:cNvPr>
+          <p:cNvPr id="15" name="Image 2" descr="3 · The change set">    </p:cNvPr>
           <p:cNvPicPr>
             <a:picLocks noChangeAspect="1"/>
           </p:cNvPicPr>
@@ -14097,8 +12440,8 @@
         </p:blipFill>
         <p:spPr>
           <a:xfrm>
-            <a:off x="757123" y="4250131"/>
-            <a:ext cx="204826" cy="204826"/>
+            <a:off x="658368" y="4162483"/>
+            <a:ext cx="5221224" cy="1449970"/>
           </a:xfrm>
           <a:prstGeom prst="rect">
             <a:avLst/>
@@ -14146,7 +12489,7 @@
                   <a:schemeClr val="tx2"/>
                 </a:solidFill>
               </a:rPr>
-              <a:t>  Run summary “ready for review” with the add / modify / remove list</a:t>
+              <a:t>  “ready for review”: every add, modify and remove, with a link to AWS</a:t>
             </a:r>
             <a:endParaRPr lang="en-US" sz="1400" dirty="0"/>
           </a:p>
@@ -14154,7 +12497,7 @@
       </p:sp>
       <p:sp>
         <p:nvSpPr>
-          <p:cNvPr id="17" name="Screenshot frame"/>
+          <p:cNvPr id="17" name="Screenshot panel"/>
           <p:cNvSpPr/>
           <p:nvPr/>
         </p:nvSpPr>
@@ -14171,37 +12514,37 @@
           <a:solidFill>
             <a:schemeClr val="bg2"/>
           </a:solidFill>
-          <a:ln w="15875">
+          <a:ln/>
+        </p:spPr>
+      </p:sp>
+      <p:sp>
+        <p:nvSpPr>
+          <p:cNvPr id="18" name="Screenshot border"/>
+          <p:cNvSpPr/>
+          <p:nvPr/>
+        </p:nvSpPr>
+        <p:spPr>
+          <a:xfrm>
+            <a:off x="6291072" y="4216527"/>
+            <a:ext cx="5257800" cy="1341882"/>
+          </a:xfrm>
+          <a:prstGeom prst="rect">
+            <a:avLst/>
+          </a:prstGeom>
+          <a:solidFill>
+            <a:schemeClr val="bg1"/>
+          </a:solidFill>
+          <a:ln w="9525">
             <a:solidFill>
-              <a:schemeClr val="accent5"/>
+              <a:srgbClr val="C9D1DB"/>
             </a:solidFill>
-            <a:prstDash val="dash"/>
+            <a:prstDash val="solid"/>
           </a:ln>
-        </p:spPr>
-      </p:sp>
-      <p:sp>
-        <p:nvSpPr>
-          <p:cNvPr id="18" name="Shape 13"/>
-          <p:cNvSpPr/>
-          <p:nvPr/>
-        </p:nvSpPr>
-        <p:spPr>
-          <a:xfrm>
-            <a:off x="6327648" y="4169664"/>
-            <a:ext cx="365760" cy="365760"/>
-          </a:xfrm>
-          <a:prstGeom prst="ellipse">
-            <a:avLst/>
-          </a:prstGeom>
-          <a:solidFill>
-            <a:schemeClr val="accent5"/>
-          </a:solidFill>
-          <a:ln/>
         </p:spPr>
       </p:sp>
       <p:pic>
         <p:nvPicPr>
-          <p:cNvPr id="19" name="Image 3" descr="preencoded.png">    </p:cNvPr>
+          <p:cNvPr id="19" name="Image 3" descr="4 · Deployed">    </p:cNvPr>
           <p:cNvPicPr>
             <a:picLocks noChangeAspect="1"/>
           </p:cNvPicPr>
@@ -14215,8 +12558,8 @@
         </p:blipFill>
         <p:spPr>
           <a:xfrm>
-            <a:off x="6408115" y="4250131"/>
-            <a:ext cx="204826" cy="204826"/>
+            <a:off x="6309360" y="4234815"/>
+            <a:ext cx="5221224" cy="1305306"/>
           </a:xfrm>
           <a:prstGeom prst="rect">
             <a:avLst/>
@@ -14253,7 +12596,7 @@
                   <a:schemeClr val="tx1"/>
                 </a:solidFill>
               </a:rPr>
-              <a:t>4 · Review and Execute</a:t>
+              <a:t>4 · Deployed</a:t>
             </a:r>
             <a:pPr indent="0" marL="0">
               <a:buNone/>
@@ -14264,129 +12607,9 @@
                   <a:schemeClr val="tx2"/>
                 </a:solidFill>
               </a:rPr>
-              <a:t>  AWS CloudFormation console: the change set page with the Execute button</a:t>
+              <a:t>  with Deploy = yes, the same change set runs and the result is reported</a:t>
             </a:r>
             <a:endParaRPr lang="en-US" sz="1400" dirty="0"/>
-          </a:p>
-        </p:txBody>
-      </p:sp>
-      <p:sp>
-        <p:nvSpPr>
-          <p:cNvPr id="22" name="Text 1"/>
-          <p:cNvSpPr/>
-          <p:nvPr>
-            <p:ph idx="103" hasCustomPrompt="1"/>
-          </p:nvPr>
-        </p:nvSpPr>
-        <p:spPr>
-          <a:xfrm>
-            <a:off x="548640" y="1645920"/>
-            <a:ext cx="5440680" cy="1691640"/>
-          </a:xfrm>
-          <a:prstGeom prst="rect">
-            <a:avLst/>
-          </a:prstGeom>
-          <a:noFill/>
-          <a:ln/>
-        </p:spPr>
-        <p:txBody>
-          <a:bodyPr wrap="square" lIns="558800" tIns="50800" rIns="558800" bIns="50800" rtlCol="0" anchor="ctr"/>
-          <a:lstStyle/>
-          <a:p>
-            <a:pPr algn="ctr" indent="0" marL="0">
-              <a:buNone/>
-            </a:pPr>
-            <a:endParaRPr lang="en-US" sz="1200" dirty="0"/>
-          </a:p>
-        </p:txBody>
-      </p:sp>
-      <p:sp>
-        <p:nvSpPr>
-          <p:cNvPr id="23" name="Text 1"/>
-          <p:cNvSpPr/>
-          <p:nvPr>
-            <p:ph idx="104" hasCustomPrompt="1"/>
-          </p:nvPr>
-        </p:nvSpPr>
-        <p:spPr>
-          <a:xfrm>
-            <a:off x="6199632" y="1645920"/>
-            <a:ext cx="5440680" cy="1691640"/>
-          </a:xfrm>
-          <a:prstGeom prst="rect">
-            <a:avLst/>
-          </a:prstGeom>
-          <a:noFill/>
-          <a:ln/>
-        </p:spPr>
-        <p:txBody>
-          <a:bodyPr wrap="square" lIns="558800" tIns="50800" rIns="558800" bIns="50800" rtlCol="0" anchor="ctr"/>
-          <a:lstStyle/>
-          <a:p>
-            <a:pPr algn="ctr" indent="0" marL="0">
-              <a:buNone/>
-            </a:pPr>
-            <a:endParaRPr lang="en-US" sz="1200" dirty="0"/>
-          </a:p>
-        </p:txBody>
-      </p:sp>
-      <p:sp>
-        <p:nvSpPr>
-          <p:cNvPr id="24" name="Text 1"/>
-          <p:cNvSpPr/>
-          <p:nvPr>
-            <p:ph idx="105" hasCustomPrompt="1"/>
-          </p:nvPr>
-        </p:nvSpPr>
-        <p:spPr>
-          <a:xfrm>
-            <a:off x="548640" y="4041648"/>
-            <a:ext cx="5440680" cy="1691640"/>
-          </a:xfrm>
-          <a:prstGeom prst="rect">
-            <a:avLst/>
-          </a:prstGeom>
-          <a:noFill/>
-          <a:ln/>
-        </p:spPr>
-        <p:txBody>
-          <a:bodyPr wrap="square" lIns="558800" tIns="50800" rIns="558800" bIns="50800" rtlCol="0" anchor="ctr"/>
-          <a:lstStyle/>
-          <a:p>
-            <a:pPr algn="ctr" indent="0" marL="0">
-              <a:buNone/>
-            </a:pPr>
-            <a:endParaRPr lang="en-US" sz="1200" dirty="0"/>
-          </a:p>
-        </p:txBody>
-      </p:sp>
-      <p:sp>
-        <p:nvSpPr>
-          <p:cNvPr id="25" name="Text 1"/>
-          <p:cNvSpPr/>
-          <p:nvPr>
-            <p:ph idx="106" hasCustomPrompt="1"/>
-          </p:nvPr>
-        </p:nvSpPr>
-        <p:spPr>
-          <a:xfrm>
-            <a:off x="6199632" y="4041648"/>
-            <a:ext cx="5440680" cy="1691640"/>
-          </a:xfrm>
-          <a:prstGeom prst="rect">
-            <a:avLst/>
-          </a:prstGeom>
-          <a:noFill/>
-          <a:ln/>
-        </p:spPr>
-        <p:txBody>
-          <a:bodyPr wrap="square" lIns="558800" tIns="50800" rIns="558800" bIns="50800" rtlCol="0" anchor="ctr"/>
-          <a:lstStyle/>
-          <a:p>
-            <a:pPr algn="ctr" indent="0" marL="0">
-              <a:buNone/>
-            </a:pPr>
-            <a:endParaRPr lang="en-US" sz="1200" dirty="0"/>
           </a:p>
         </p:txBody>
       </p:sp>
@@ -15569,7 +13792,7 @@
       </p:sp>
       <p:sp>
         <p:nvSpPr>
-          <p:cNvPr id="38" name="Apply: Approval (missing)"/>
+          <p:cNvPr id="38" name="Apply: Approval"/>
           <p:cNvSpPr/>
           <p:nvPr/>
         </p:nvSpPr>
@@ -15588,7 +13811,7 @@
           </a:solidFill>
           <a:ln w="15875">
             <a:solidFill>
-              <a:schemeClr val="accent3"/>
+              <a:schemeClr val="accent2"/>
             </a:solidFill>
             <a:prstDash val="dash"/>
           </a:ln>
@@ -15609,7 +13832,7 @@
             <a:avLst/>
           </a:prstGeom>
           <a:solidFill>
-            <a:schemeClr val="accent3"/>
+            <a:schemeClr val="accent2"/>
           </a:solidFill>
           <a:ln/>
         </p:spPr>
@@ -15704,7 +13927,7 @@
                   <a:schemeClr val="tx2"/>
                 </a:solidFill>
               </a:rPr>
-              <a:t>Promised in the file — but the job isn’t there</a:t>
+              <a:t>Outside sandbox, a gatekeeper approves first</a:t>
             </a:r>
             <a:endParaRPr lang="en-US" sz="1200" dirty="0"/>
           </a:p>
@@ -16050,47 +14273,7 @@
       </p:sp>
       <p:sp>
         <p:nvSpPr>
-          <p:cNvPr id="55" name="Missing approval"/>
-          <p:cNvSpPr txBox="1"/>
-          <p:nvPr/>
-        </p:nvSpPr>
-        <p:spPr>
-          <a:xfrm>
-            <a:off x="8266176" y="3511296"/>
-            <a:ext cx="822960" cy="256032"/>
-          </a:xfrm>
-          <a:prstGeom prst="roundRect">
-            <a:avLst>
-              <a:gd name="adj" fmla="val 46429"/>
-            </a:avLst>
-          </a:prstGeom>
-          <a:solidFill>
-            <a:schemeClr val="accent3"/>
-          </a:solidFill>
-          <a:ln/>
-        </p:spPr>
-        <p:txBody>
-          <a:bodyPr wrap="square" lIns="0" tIns="0" rIns="0" bIns="0" rtlCol="0" anchor="ctr"/>
-          <a:lstStyle/>
-          <a:p>
-            <a:pPr algn="ctr" indent="0" marL="0">
-              <a:buNone/>
-            </a:pPr>
-            <a:r>
-              <a:rPr lang="en-US" sz="1000" b="1" spc="150" kern="0" dirty="0">
-                <a:solidFill>
-                  <a:schemeClr val="bg1"/>
-                </a:solidFill>
-              </a:rPr>
-              <a:t>MISSING</a:t>
-            </a:r>
-            <a:endParaRPr lang="en-US" sz="1000" dirty="0"/>
-          </a:p>
-        </p:txBody>
-      </p:sp>
-      <p:sp>
-        <p:nvSpPr>
-          <p:cNvPr id="56" name="Edit and merge"/>
+          <p:cNvPr id="55" name="Edit and merge"/>
           <p:cNvSpPr/>
           <p:nvPr/>
         </p:nvSpPr>
@@ -16114,7 +14297,7 @@
       </p:sp>
       <p:pic>
         <p:nvPicPr>
-          <p:cNvPr id="57" name="Image 8" descr="preencoded.png">    </p:cNvPr>
+          <p:cNvPr id="56" name="Image 8" descr="preencoded.png">    </p:cNvPr>
           <p:cNvPicPr>
             <a:picLocks noChangeAspect="1"/>
           </p:cNvPicPr>
@@ -16138,7 +14321,7 @@
       </p:pic>
       <p:sp>
         <p:nvSpPr>
-          <p:cNvPr id="58" name="Text 47"/>
+          <p:cNvPr id="57" name="Text 46"/>
           <p:cNvSpPr txBox="1"/>
           <p:nvPr/>
         </p:nvSpPr>
@@ -16174,7 +14357,7 @@
       </p:sp>
       <p:sp>
         <p:nvSpPr>
-          <p:cNvPr id="59" name="Shape 48"/>
+          <p:cNvPr id="58" name="Shape 47"/>
           <p:cNvSpPr/>
           <p:nvPr/>
         </p:nvSpPr>
@@ -16198,7 +14381,7 @@
       </p:sp>
       <p:sp>
         <p:nvSpPr>
-          <p:cNvPr id="60" name="Shape 49"/>
+          <p:cNvPr id="59" name="Shape 48"/>
           <p:cNvSpPr/>
           <p:nvPr/>
         </p:nvSpPr>
@@ -16222,7 +14405,7 @@
       </p:sp>
       <p:sp>
         <p:nvSpPr>
-          <p:cNvPr id="61" name="Shape 50"/>
+          <p:cNvPr id="60" name="Shape 49"/>
           <p:cNvSpPr/>
           <p:nvPr/>
         </p:nvSpPr>
@@ -16245,7 +14428,7 @@
       </p:sp>
       <p:sp>
         <p:nvSpPr>
-          <p:cNvPr id="62" name="Gap: No manual-change alarm"/>
+          <p:cNvPr id="61" name="Gap: No manual-change alarm"/>
           <p:cNvSpPr/>
           <p:nvPr/>
         </p:nvSpPr>
@@ -16274,7 +14457,7 @@
       </p:sp>
       <p:sp>
         <p:nvSpPr>
-          <p:cNvPr id="63" name="Shape 52"/>
+          <p:cNvPr id="62" name="Shape 51"/>
           <p:cNvSpPr/>
           <p:nvPr/>
         </p:nvSpPr>
@@ -16294,7 +14477,7 @@
       </p:sp>
       <p:pic>
         <p:nvPicPr>
-          <p:cNvPr id="64" name="Image 9" descr="preencoded.png">    </p:cNvPr>
+          <p:cNvPr id="63" name="Image 9" descr="preencoded.png">    </p:cNvPr>
           <p:cNvPicPr>
             <a:picLocks noChangeAspect="1"/>
           </p:cNvPicPr>
@@ -16318,48 +14501,48 @@
       </p:pic>
       <p:sp>
         <p:nvSpPr>
+          <p:cNvPr id="64" name="Text 52"/>
+          <p:cNvSpPr txBox="1"/>
+          <p:nvPr/>
+        </p:nvSpPr>
+        <p:spPr>
+          <a:xfrm>
+            <a:off x="5285232" y="5111496"/>
+            <a:ext cx="1362456" cy="384048"/>
+          </a:xfrm>
+          <a:prstGeom prst="rect">
+            <a:avLst/>
+          </a:prstGeom>
+          <a:noFill/>
+          <a:ln/>
+        </p:spPr>
+        <p:txBody>
+          <a:bodyPr wrap="square" lIns="0" tIns="0" rIns="0" bIns="0" rtlCol="0" anchor="ctr"/>
+          <a:lstStyle/>
+          <a:p>
+            <a:pPr indent="0" marL="0">
+              <a:buNone/>
+            </a:pPr>
+            <a:r>
+              <a:rPr lang="en-US" sz="1300" b="1" dirty="0">
+                <a:solidFill>
+                  <a:schemeClr val="tx1"/>
+                </a:solidFill>
+              </a:rPr>
+              <a:t>No manual-change alarm</a:t>
+            </a:r>
+            <a:endParaRPr lang="en-US" sz="1300" dirty="0"/>
+          </a:p>
+        </p:txBody>
+      </p:sp>
+      <p:sp>
+        <p:nvSpPr>
           <p:cNvPr id="65" name="Text 53"/>
           <p:cNvSpPr txBox="1"/>
           <p:nvPr/>
         </p:nvSpPr>
         <p:spPr>
           <a:xfrm>
-            <a:off x="5285232" y="5111496"/>
-            <a:ext cx="1362456" cy="384048"/>
-          </a:xfrm>
-          <a:prstGeom prst="rect">
-            <a:avLst/>
-          </a:prstGeom>
-          <a:noFill/>
-          <a:ln/>
-        </p:spPr>
-        <p:txBody>
-          <a:bodyPr wrap="square" lIns="0" tIns="0" rIns="0" bIns="0" rtlCol="0" anchor="ctr"/>
-          <a:lstStyle/>
-          <a:p>
-            <a:pPr indent="0" marL="0">
-              <a:buNone/>
-            </a:pPr>
-            <a:r>
-              <a:rPr lang="en-US" sz="1300" b="1" dirty="0">
-                <a:solidFill>
-                  <a:schemeClr val="tx1"/>
-                </a:solidFill>
-              </a:rPr>
-              <a:t>No manual-change alarm</a:t>
-            </a:r>
-            <a:endParaRPr lang="en-US" sz="1300" dirty="0"/>
-          </a:p>
-        </p:txBody>
-      </p:sp>
-      <p:sp>
-        <p:nvSpPr>
-          <p:cNvPr id="66" name="Text 54"/>
-          <p:cNvSpPr txBox="1"/>
-          <p:nvPr/>
-        </p:nvSpPr>
-        <p:spPr>
-          <a:xfrm>
             <a:off x="4809744" y="5586984"/>
             <a:ext cx="1819656" cy="603504"/>
           </a:xfrm>
@@ -16390,7 +14573,7 @@
       </p:sp>
       <p:sp>
         <p:nvSpPr>
-          <p:cNvPr id="67" name="Shape 55"/>
+          <p:cNvPr id="66" name="Shape 54"/>
           <p:cNvSpPr/>
           <p:nvPr/>
         </p:nvSpPr>
@@ -16413,7 +14596,7 @@
       </p:sp>
       <p:sp>
         <p:nvSpPr>
-          <p:cNvPr id="68" name="Gap: Goes live at once"/>
+          <p:cNvPr id="67" name="Gap: Preview isn’t locked"/>
           <p:cNvSpPr/>
           <p:nvPr/>
         </p:nvSpPr>
@@ -16442,7 +14625,7 @@
       </p:sp>
       <p:sp>
         <p:nvSpPr>
-          <p:cNvPr id="69" name="Shape 57"/>
+          <p:cNvPr id="68" name="Shape 56"/>
           <p:cNvSpPr/>
           <p:nvPr/>
         </p:nvSpPr>
@@ -16462,7 +14645,7 @@
       </p:sp>
       <p:pic>
         <p:nvPicPr>
-          <p:cNvPr id="70" name="Image 10" descr="preencoded.png">    </p:cNvPr>
+          <p:cNvPr id="69" name="Image 10" descr="preencoded.png">    </p:cNvPr>
           <p:cNvPicPr>
             <a:picLocks noChangeAspect="1"/>
           </p:cNvPicPr>
@@ -16486,48 +14669,48 @@
       </p:pic>
       <p:sp>
         <p:nvSpPr>
+          <p:cNvPr id="70" name="Text 57"/>
+          <p:cNvSpPr txBox="1"/>
+          <p:nvPr/>
+        </p:nvSpPr>
+        <p:spPr>
+          <a:xfrm>
+            <a:off x="7726680" y="5111496"/>
+            <a:ext cx="1362456" cy="384048"/>
+          </a:xfrm>
+          <a:prstGeom prst="rect">
+            <a:avLst/>
+          </a:prstGeom>
+          <a:noFill/>
+          <a:ln/>
+        </p:spPr>
+        <p:txBody>
+          <a:bodyPr wrap="square" lIns="0" tIns="0" rIns="0" bIns="0" rtlCol="0" anchor="ctr"/>
+          <a:lstStyle/>
+          <a:p>
+            <a:pPr indent="0" marL="0">
+              <a:buNone/>
+            </a:pPr>
+            <a:r>
+              <a:rPr lang="en-US" sz="1300" b="1" dirty="0">
+                <a:solidFill>
+                  <a:schemeClr val="tx1"/>
+                </a:solidFill>
+              </a:rPr>
+              <a:t>Preview isn’t locked</a:t>
+            </a:r>
+            <a:endParaRPr lang="en-US" sz="1300" dirty="0"/>
+          </a:p>
+        </p:txBody>
+      </p:sp>
+      <p:sp>
+        <p:nvSpPr>
           <p:cNvPr id="71" name="Text 58"/>
           <p:cNvSpPr txBox="1"/>
           <p:nvPr/>
         </p:nvSpPr>
         <p:spPr>
           <a:xfrm>
-            <a:off x="7726680" y="5111496"/>
-            <a:ext cx="1362456" cy="384048"/>
-          </a:xfrm>
-          <a:prstGeom prst="rect">
-            <a:avLst/>
-          </a:prstGeom>
-          <a:noFill/>
-          <a:ln/>
-        </p:spPr>
-        <p:txBody>
-          <a:bodyPr wrap="square" lIns="0" tIns="0" rIns="0" bIns="0" rtlCol="0" anchor="ctr"/>
-          <a:lstStyle/>
-          <a:p>
-            <a:pPr indent="0" marL="0">
-              <a:buNone/>
-            </a:pPr>
-            <a:r>
-              <a:rPr lang="en-US" sz="1300" b="1" dirty="0">
-                <a:solidFill>
-                  <a:schemeClr val="tx1"/>
-                </a:solidFill>
-              </a:rPr>
-              <a:t>Goes live at once</a:t>
-            </a:r>
-            <a:endParaRPr lang="en-US" sz="1300" dirty="0"/>
-          </a:p>
-        </p:txBody>
-      </p:sp>
-      <p:sp>
-        <p:nvSpPr>
-          <p:cNvPr id="72" name="Text 59"/>
-          <p:cNvSpPr txBox="1"/>
-          <p:nvPr/>
-        </p:nvSpPr>
-        <p:spPr>
-          <a:xfrm>
             <a:off x="7251192" y="5586984"/>
             <a:ext cx="1819656" cy="603504"/>
           </a:xfrm>
@@ -16550,7 +14733,7 @@
                   <a:schemeClr val="tx2"/>
                 </a:solidFill>
               </a:rPr>
-              <a:t>Tick ‘execute’ and changes go live right after the preview — production too</a:t>
+              <a:t>Apply works the changes out again — what runs isn’t pinned to the preview</a:t>
             </a:r>
             <a:endParaRPr lang="en-US" sz="1200" dirty="0"/>
           </a:p>
@@ -16558,7 +14741,7 @@
       </p:sp>
       <p:sp>
         <p:nvSpPr>
-          <p:cNvPr id="73" name="Shape 60"/>
+          <p:cNvPr id="72" name="Shape 59"/>
           <p:cNvSpPr/>
           <p:nvPr/>
         </p:nvSpPr>
@@ -16581,7 +14764,7 @@
       </p:sp>
       <p:sp>
         <p:nvSpPr>
-          <p:cNvPr id="74" name="Gap: Outside CloudFormation"/>
+          <p:cNvPr id="73" name="Gap: Outside CloudFormation"/>
           <p:cNvSpPr/>
           <p:nvPr/>
         </p:nvSpPr>
@@ -16610,7 +14793,7 @@
       </p:sp>
       <p:sp>
         <p:nvSpPr>
-          <p:cNvPr id="75" name="Shape 62"/>
+          <p:cNvPr id="74" name="Shape 61"/>
           <p:cNvSpPr/>
           <p:nvPr/>
         </p:nvSpPr>
@@ -16630,7 +14813,7 @@
       </p:sp>
       <p:pic>
         <p:nvPicPr>
-          <p:cNvPr id="76" name="Image 11" descr="preencoded.png">    </p:cNvPr>
+          <p:cNvPr id="75" name="Image 11" descr="preencoded.png">    </p:cNvPr>
           <p:cNvPicPr>
             <a:picLocks noChangeAspect="1"/>
           </p:cNvPicPr>
@@ -16654,48 +14837,48 @@
       </p:pic>
       <p:sp>
         <p:nvSpPr>
+          <p:cNvPr id="76" name="Text 62"/>
+          <p:cNvSpPr txBox="1"/>
+          <p:nvPr/>
+        </p:nvSpPr>
+        <p:spPr>
+          <a:xfrm>
+            <a:off x="10168128" y="5111496"/>
+            <a:ext cx="1362456" cy="384048"/>
+          </a:xfrm>
+          <a:prstGeom prst="rect">
+            <a:avLst/>
+          </a:prstGeom>
+          <a:noFill/>
+          <a:ln/>
+        </p:spPr>
+        <p:txBody>
+          <a:bodyPr wrap="square" lIns="0" tIns="0" rIns="0" bIns="0" rtlCol="0" anchor="ctr"/>
+          <a:lstStyle/>
+          <a:p>
+            <a:pPr indent="0" marL="0">
+              <a:buNone/>
+            </a:pPr>
+            <a:r>
+              <a:rPr lang="en-US" sz="1300" b="1" dirty="0">
+                <a:solidFill>
+                  <a:schemeClr val="tx1"/>
+                </a:solidFill>
+              </a:rPr>
+              <a:t>Outside CloudFormation</a:t>
+            </a:r>
+            <a:endParaRPr lang="en-US" sz="1300" dirty="0"/>
+          </a:p>
+        </p:txBody>
+      </p:sp>
+      <p:sp>
+        <p:nvSpPr>
           <p:cNvPr id="77" name="Text 63"/>
           <p:cNvSpPr txBox="1"/>
           <p:nvPr/>
         </p:nvSpPr>
         <p:spPr>
           <a:xfrm>
-            <a:off x="10168128" y="5111496"/>
-            <a:ext cx="1362456" cy="384048"/>
-          </a:xfrm>
-          <a:prstGeom prst="rect">
-            <a:avLst/>
-          </a:prstGeom>
-          <a:noFill/>
-          <a:ln/>
-        </p:spPr>
-        <p:txBody>
-          <a:bodyPr wrap="square" lIns="0" tIns="0" rIns="0" bIns="0" rtlCol="0" anchor="ctr"/>
-          <a:lstStyle/>
-          <a:p>
-            <a:pPr indent="0" marL="0">
-              <a:buNone/>
-            </a:pPr>
-            <a:r>
-              <a:rPr lang="en-US" sz="1300" b="1" dirty="0">
-                <a:solidFill>
-                  <a:schemeClr val="tx1"/>
-                </a:solidFill>
-              </a:rPr>
-              <a:t>Outside CloudFormation</a:t>
-            </a:r>
-            <a:endParaRPr lang="en-US" sz="1300" dirty="0"/>
-          </a:p>
-        </p:txBody>
-      </p:sp>
-      <p:sp>
-        <p:nvSpPr>
-          <p:cNvPr id="78" name="Text 64"/>
-          <p:cNvSpPr txBox="1"/>
-          <p:nvPr/>
-        </p:nvSpPr>
-        <p:spPr>
-          <a:xfrm>
             <a:off x="9692640" y="5586984"/>
             <a:ext cx="1819656" cy="603504"/>
           </a:xfrm>
@@ -16726,7 +14909,7 @@
       </p:sp>
       <p:sp>
         <p:nvSpPr>
-          <p:cNvPr id="79" name="Text 65"/>
+          <p:cNvPr id="78" name="Text 64"/>
           <p:cNvSpPr txBox="1"/>
           <p:nvPr/>
         </p:nvSpPr>
@@ -16969,11 +15152,11 @@
         <p:spPr>
           <a:xfrm>
             <a:off x="548640" y="1691640"/>
-            <a:ext cx="6629400" cy="1783080"/>
+            <a:ext cx="5440680" cy="3611880"/>
           </a:xfrm>
           <a:prstGeom prst="roundRect">
             <a:avLst>
-              <a:gd name="adj" fmla="val 6154"/>
+              <a:gd name="adj" fmla="val 3038"/>
             </a:avLst>
           </a:prstGeom>
           <a:solidFill>
@@ -16992,8 +15175,8 @@
         </p:nvSpPr>
         <p:spPr>
           <a:xfrm>
-            <a:off x="749808" y="1847088"/>
-            <a:ext cx="384048" cy="384048"/>
+            <a:off x="777240" y="1901952"/>
+            <a:ext cx="457200" cy="457200"/>
           </a:xfrm>
           <a:prstGeom prst="ellipse">
             <a:avLst/>
@@ -17020,8 +15203,8 @@
         </p:blipFill>
         <p:spPr>
           <a:xfrm>
-            <a:off x="834299" y="1931579"/>
-            <a:ext cx="215067" cy="215067"/>
+            <a:off x="877824" y="2002536"/>
+            <a:ext cx="256032" cy="256032"/>
           </a:xfrm>
           <a:prstGeom prst="rect">
             <a:avLst/>
@@ -17036,8 +15219,8 @@
         </p:nvSpPr>
         <p:spPr>
           <a:xfrm>
-            <a:off x="1261872" y="1847088"/>
-            <a:ext cx="4572000" cy="384048"/>
+            <a:off x="1371600" y="1901952"/>
+            <a:ext cx="4389120" cy="457200"/>
           </a:xfrm>
           <a:prstGeom prst="rect">
             <a:avLst/>
@@ -17053,14 +15236,14 @@
               <a:buNone/>
             </a:pPr>
             <a:r>
-              <a:rPr lang="en-US" sz="1800" b="1" dirty="0">
+              <a:rPr lang="en-US" sz="2000" b="1" dirty="0">
                 <a:solidFill>
                   <a:schemeClr val="tx1"/>
                 </a:solidFill>
               </a:rPr>
               <a:t>Good at</a:t>
             </a:r>
-            <a:endParaRPr lang="en-US" sz="1800" dirty="0"/>
+            <a:endParaRPr lang="en-US" sz="2000" dirty="0"/>
           </a:p>
         </p:txBody>
       </p:sp>
@@ -17080,7 +15263,7 @@
         </p:blipFill>
         <p:spPr>
           <a:xfrm>
-            <a:off x="777240" y="2403602"/>
+            <a:off x="822960" y="2621661"/>
             <a:ext cx="219456" cy="219456"/>
           </a:xfrm>
           <a:prstGeom prst="rect">
@@ -17096,8 +15279,8 @@
         </p:nvSpPr>
         <p:spPr>
           <a:xfrm>
-            <a:off x="1124712" y="2395728"/>
-            <a:ext cx="5916168" cy="271780"/>
+            <a:off x="1170432" y="2606040"/>
+            <a:ext cx="4590288" cy="519684"/>
           </a:xfrm>
           <a:prstGeom prst="rect">
             <a:avLst/>
@@ -17113,14 +15296,14 @@
               <a:buNone/>
             </a:pPr>
             <a:r>
-              <a:rPr lang="en-US" sz="1400" dirty="0">
+              <a:rPr lang="en-US" sz="1500" dirty="0">
                 <a:solidFill>
                   <a:schemeClr val="tx1"/>
                 </a:solidFill>
               </a:rPr>
               <a:t>Bulk edits — a zone’s records exported to a file and changed in one go</a:t>
             </a:r>
-            <a:endParaRPr lang="en-US" sz="1400" dirty="0"/>
+            <a:endParaRPr lang="en-US" sz="1500" dirty="0"/>
           </a:p>
         </p:txBody>
       </p:sp>
@@ -17140,7 +15323,7 @@
         </p:blipFill>
         <p:spPr>
           <a:xfrm>
-            <a:off x="777240" y="2748534"/>
+            <a:off x="822960" y="3269361"/>
             <a:ext cx="219456" cy="219456"/>
           </a:xfrm>
           <a:prstGeom prst="rect">
@@ -17156,8 +15339,8 @@
         </p:nvSpPr>
         <p:spPr>
           <a:xfrm>
-            <a:off x="1124712" y="2740660"/>
-            <a:ext cx="5916168" cy="271780"/>
+            <a:off x="1170432" y="3253740"/>
+            <a:ext cx="4590288" cy="519684"/>
           </a:xfrm>
           <a:prstGeom prst="rect">
             <a:avLst/>
@@ -17173,14 +15356,14 @@
               <a:buNone/>
             </a:pPr>
             <a:r>
-              <a:rPr lang="en-US" sz="1400" dirty="0">
+              <a:rPr lang="en-US" sz="1500" dirty="0">
                 <a:solidFill>
                   <a:schemeClr val="tx1"/>
                 </a:solidFill>
               </a:rPr>
               <a:t>Edits are reviewed as a Pull Request — the export opens one for you</a:t>
             </a:r>
-            <a:endParaRPr lang="en-US" sz="1400" dirty="0"/>
+            <a:endParaRPr lang="en-US" sz="1500" dirty="0"/>
           </a:p>
         </p:txBody>
       </p:sp>
@@ -17200,7 +15383,7 @@
         </p:blipFill>
         <p:spPr>
           <a:xfrm>
-            <a:off x="777240" y="3093466"/>
+            <a:off x="822960" y="3917061"/>
             <a:ext cx="219456" cy="219456"/>
           </a:xfrm>
           <a:prstGeom prst="rect">
@@ -17216,8 +15399,8 @@
         </p:nvSpPr>
         <p:spPr>
           <a:xfrm>
-            <a:off x="1124712" y="3085592"/>
-            <a:ext cx="5916168" cy="271780"/>
+            <a:off x="1170432" y="3901440"/>
+            <a:ext cx="4590288" cy="519684"/>
           </a:xfrm>
           <a:prstGeom prst="rect">
             <a:avLst/>
@@ -17233,64 +15416,20 @@
               <a:buNone/>
             </a:pPr>
             <a:r>
-              <a:rPr lang="en-US" sz="1400" dirty="0">
+              <a:rPr lang="en-US" sz="1500" dirty="0">
                 <a:solidFill>
                   <a:schemeClr val="tx1"/>
                 </a:solidFill>
               </a:rPr>
               <a:t>Preview first; deleting records is off unless someone ticks the box</a:t>
             </a:r>
-            <a:endParaRPr lang="en-US" sz="1400" dirty="0"/>
-          </a:p>
-        </p:txBody>
-      </p:sp>
-      <p:sp>
-        <p:nvSpPr>
-          <p:cNvPr id="15" name="What it doesn’t do"/>
-          <p:cNvSpPr/>
-          <p:nvPr/>
-        </p:nvSpPr>
-        <p:spPr>
-          <a:xfrm>
-            <a:off x="548640" y="3639312"/>
-            <a:ext cx="6629400" cy="2624328"/>
-          </a:xfrm>
-          <a:prstGeom prst="roundRect">
-            <a:avLst>
-              <a:gd name="adj" fmla="val 4181"/>
-            </a:avLst>
-          </a:prstGeom>
-          <a:solidFill>
-            <a:schemeClr val="accent3">
-              <a:alpha val="8000"/>
-            </a:schemeClr>
-          </a:solidFill>
-          <a:ln/>
-        </p:spPr>
-      </p:sp>
-      <p:sp>
-        <p:nvSpPr>
-          <p:cNvPr id="16" name="Shape 10"/>
-          <p:cNvSpPr/>
-          <p:nvPr/>
-        </p:nvSpPr>
-        <p:spPr>
-          <a:xfrm>
-            <a:off x="749808" y="3794760"/>
-            <a:ext cx="384048" cy="384048"/>
-          </a:xfrm>
-          <a:prstGeom prst="ellipse">
-            <a:avLst/>
-          </a:prstGeom>
-          <a:solidFill>
-            <a:schemeClr val="accent3"/>
-          </a:solidFill>
-          <a:ln/>
-        </p:spPr>
+            <a:endParaRPr lang="en-US" sz="1500" dirty="0"/>
+          </a:p>
+        </p:txBody>
       </p:sp>
       <p:pic>
         <p:nvPicPr>
-          <p:cNvPr id="17" name="Image 4" descr="preencoded.png">    </p:cNvPr>
+          <p:cNvPr id="15" name="Image 4" descr="preencoded.png">    </p:cNvPr>
           <p:cNvPicPr>
             <a:picLocks noChangeAspect="1"/>
           </p:cNvPicPr>
@@ -17304,8 +15443,8 @@
         </p:blipFill>
         <p:spPr>
           <a:xfrm>
-            <a:off x="834299" y="3879251"/>
-            <a:ext cx="215067" cy="215067"/>
+            <a:off x="822960" y="4564761"/>
+            <a:ext cx="219456" cy="219456"/>
           </a:xfrm>
           <a:prstGeom prst="rect">
             <a:avLst/>
@@ -17314,39 +15453,83 @@
       </p:pic>
       <p:sp>
         <p:nvSpPr>
-          <p:cNvPr id="18" name="Text 11"/>
+          <p:cNvPr id="16" name="Text 9"/>
           <p:cNvSpPr txBox="1"/>
           <p:nvPr/>
         </p:nvSpPr>
         <p:spPr>
           <a:xfrm>
-            <a:off x="1261872" y="3794760"/>
-            <a:ext cx="4572000" cy="384048"/>
-          </a:xfrm>
-          <a:prstGeom prst="rect">
-            <a:avLst/>
-          </a:prstGeom>
-          <a:noFill/>
-          <a:ln/>
-        </p:spPr>
-        <p:txBody>
-          <a:bodyPr wrap="square" lIns="0" tIns="0" rIns="0" bIns="0" rtlCol="0" anchor="ctr"/>
-          <a:lstStyle/>
-          <a:p>
-            <a:pPr indent="0" marL="0">
-              <a:buNone/>
-            </a:pPr>
-            <a:r>
-              <a:rPr lang="en-US" sz="1800" b="1" dirty="0">
+            <a:off x="1170432" y="4549140"/>
+            <a:ext cx="4590288" cy="287274"/>
+          </a:xfrm>
+          <a:prstGeom prst="rect">
+            <a:avLst/>
+          </a:prstGeom>
+          <a:noFill/>
+          <a:ln/>
+        </p:spPr>
+        <p:txBody>
+          <a:bodyPr wrap="square" lIns="0" tIns="0" rIns="0" bIns="0" rtlCol="0" anchor="t"/>
+          <a:lstStyle/>
+          <a:p>
+            <a:pPr indent="0" marL="0">
+              <a:buNone/>
+            </a:pPr>
+            <a:r>
+              <a:rPr lang="en-US" sz="1500" dirty="0">
                 <a:solidFill>
                   <a:schemeClr val="tx1"/>
                 </a:solidFill>
               </a:rPr>
-              <a:t>What it doesn’t do</a:t>
-            </a:r>
-            <a:endParaRPr lang="en-US" sz="1800" dirty="0"/>
-          </a:p>
-        </p:txBody>
+              <a:t>A gatekeeper approves changes outside sandbox</a:t>
+            </a:r>
+            <a:endParaRPr lang="en-US" sz="1500" dirty="0"/>
+          </a:p>
+        </p:txBody>
+      </p:sp>
+      <p:sp>
+        <p:nvSpPr>
+          <p:cNvPr id="17" name="What it doesn’t do"/>
+          <p:cNvSpPr/>
+          <p:nvPr/>
+        </p:nvSpPr>
+        <p:spPr>
+          <a:xfrm>
+            <a:off x="6199632" y="1691640"/>
+            <a:ext cx="5440680" cy="3611880"/>
+          </a:xfrm>
+          <a:prstGeom prst="roundRect">
+            <a:avLst>
+              <a:gd name="adj" fmla="val 3038"/>
+            </a:avLst>
+          </a:prstGeom>
+          <a:solidFill>
+            <a:schemeClr val="accent3">
+              <a:alpha val="8000"/>
+            </a:schemeClr>
+          </a:solidFill>
+          <a:ln/>
+        </p:spPr>
+      </p:sp>
+      <p:sp>
+        <p:nvSpPr>
+          <p:cNvPr id="18" name="Shape 11"/>
+          <p:cNvSpPr/>
+          <p:nvPr/>
+        </p:nvSpPr>
+        <p:spPr>
+          <a:xfrm>
+            <a:off x="6428232" y="1901952"/>
+            <a:ext cx="457200" cy="457200"/>
+          </a:xfrm>
+          <a:prstGeom prst="ellipse">
+            <a:avLst/>
+          </a:prstGeom>
+          <a:solidFill>
+            <a:schemeClr val="accent3"/>
+          </a:solidFill>
+          <a:ln/>
+        </p:spPr>
       </p:sp>
       <p:pic>
         <p:nvPicPr>
@@ -17364,8 +15547,8 @@
         </p:blipFill>
         <p:spPr>
           <a:xfrm>
-            <a:off x="777240" y="4351274"/>
-            <a:ext cx="219456" cy="219456"/>
+            <a:off x="6528816" y="2002536"/>
+            <a:ext cx="256032" cy="256032"/>
           </a:xfrm>
           <a:prstGeom prst="rect">
             <a:avLst/>
@@ -17380,31 +15563,31 @@
         </p:nvSpPr>
         <p:spPr>
           <a:xfrm>
-            <a:off x="1124712" y="4343400"/>
-            <a:ext cx="5916168" cy="488696"/>
-          </a:xfrm>
-          <a:prstGeom prst="rect">
-            <a:avLst/>
-          </a:prstGeom>
-          <a:noFill/>
-          <a:ln/>
-        </p:spPr>
-        <p:txBody>
-          <a:bodyPr wrap="square" lIns="0" tIns="0" rIns="0" bIns="0" rtlCol="0" anchor="t"/>
-          <a:lstStyle/>
-          <a:p>
-            <a:pPr indent="0" marL="0">
-              <a:buNone/>
-            </a:pPr>
-            <a:r>
-              <a:rPr lang="en-US" sz="1400" dirty="0">
+            <a:off x="7022592" y="1901952"/>
+            <a:ext cx="4389120" cy="457200"/>
+          </a:xfrm>
+          <a:prstGeom prst="rect">
+            <a:avLst/>
+          </a:prstGeom>
+          <a:noFill/>
+          <a:ln/>
+        </p:spPr>
+        <p:txBody>
+          <a:bodyPr wrap="square" lIns="0" tIns="0" rIns="0" bIns="0" rtlCol="0" anchor="ctr"/>
+          <a:lstStyle/>
+          <a:p>
+            <a:pPr indent="0" marL="0">
+              <a:buNone/>
+            </a:pPr>
+            <a:r>
+              <a:rPr lang="en-US" sz="2000" b="1" dirty="0">
                 <a:solidFill>
                   <a:schemeClr val="tx1"/>
                 </a:solidFill>
               </a:rPr>
-              <a:t>No approval gate — the file promises one outside sandbox, but the job is missing: ‘execute’ goes live at once</a:t>
-            </a:r>
-            <a:endParaRPr lang="en-US" sz="1400" dirty="0"/>
+              <a:t>What it doesn’t do</a:t>
+            </a:r>
+            <a:endParaRPr lang="en-US" sz="2000" dirty="0"/>
           </a:p>
         </p:txBody>
       </p:sp>
@@ -17424,7 +15607,7 @@
         </p:blipFill>
         <p:spPr>
           <a:xfrm>
-            <a:off x="777240" y="4913122"/>
+            <a:off x="6473952" y="2621661"/>
             <a:ext cx="219456" cy="219456"/>
           </a:xfrm>
           <a:prstGeom prst="rect">
@@ -17440,8 +15623,8 @@
         </p:nvSpPr>
         <p:spPr>
           <a:xfrm>
-            <a:off x="1124712" y="4905248"/>
-            <a:ext cx="5916168" cy="488696"/>
+            <a:off x="6821424" y="2606040"/>
+            <a:ext cx="4590288" cy="519684"/>
           </a:xfrm>
           <a:prstGeom prst="rect">
             <a:avLst/>
@@ -17457,14 +15640,14 @@
               <a:buNone/>
             </a:pPr>
             <a:r>
-              <a:rPr lang="en-US" sz="1400" dirty="0">
+              <a:rPr lang="en-US" sz="1500" dirty="0">
                 <a:solidFill>
                   <a:schemeClr val="tx1"/>
                 </a:solidFill>
               </a:rPr>
               <a:t>DNS records only — not alias records (CloudFront, load balancers), new zones or other AWS resources</a:t>
             </a:r>
-            <a:endParaRPr lang="en-US" sz="1400" dirty="0"/>
+            <a:endParaRPr lang="en-US" sz="1500" dirty="0"/>
           </a:p>
         </p:txBody>
       </p:sp>
@@ -17484,7 +15667,7 @@
         </p:blipFill>
         <p:spPr>
           <a:xfrm>
-            <a:off x="777240" y="5474970"/>
+            <a:off x="6473952" y="3269361"/>
             <a:ext cx="219456" cy="219456"/>
           </a:xfrm>
           <a:prstGeom prst="rect">
@@ -17500,8 +15683,8 @@
         </p:nvSpPr>
         <p:spPr>
           <a:xfrm>
-            <a:off x="1124712" y="5467096"/>
-            <a:ext cx="5916168" cy="271780"/>
+            <a:off x="6821424" y="3253740"/>
+            <a:ext cx="4590288" cy="519684"/>
           </a:xfrm>
           <a:prstGeom prst="rect">
             <a:avLst/>
@@ -17517,14 +15700,14 @@
               <a:buNone/>
             </a:pPr>
             <a:r>
-              <a:rPr lang="en-US" sz="1400" dirty="0">
+              <a:rPr lang="en-US" sz="1500" dirty="0">
                 <a:solidFill>
                   <a:schemeClr val="tx1"/>
                 </a:solidFill>
               </a:rPr>
               <a:t>No manual-change alarm — a hand edit is quietly overwritten next time</a:t>
             </a:r>
-            <a:endParaRPr lang="en-US" sz="1400" dirty="0"/>
+            <a:endParaRPr lang="en-US" sz="1500" dirty="0"/>
           </a:p>
         </p:txBody>
       </p:sp>
@@ -17544,7 +15727,7 @@
         </p:blipFill>
         <p:spPr>
           <a:xfrm>
-            <a:off x="777240" y="5819902"/>
+            <a:off x="6473952" y="3917061"/>
             <a:ext cx="219456" cy="219456"/>
           </a:xfrm>
           <a:prstGeom prst="rect">
@@ -17560,8 +15743,8 @@
         </p:nvSpPr>
         <p:spPr>
           <a:xfrm>
-            <a:off x="1124712" y="5812028"/>
-            <a:ext cx="5916168" cy="271780"/>
+            <a:off x="6821424" y="3901440"/>
+            <a:ext cx="4590288" cy="519684"/>
           </a:xfrm>
           <a:prstGeom prst="rect">
             <a:avLst/>
@@ -17577,67 +15760,20 @@
               <a:buNone/>
             </a:pPr>
             <a:r>
-              <a:rPr lang="en-US" sz="1400" dirty="0">
+              <a:rPr lang="en-US" sz="1500" dirty="0">
                 <a:solidFill>
                   <a:schemeClr val="tx1"/>
                 </a:solidFill>
               </a:rPr>
-              <a:t>Works outside CloudFormation — no change set or stack history</a:t>
-            </a:r>
-            <a:endParaRPr lang="en-US" sz="1400" dirty="0"/>
-          </a:p>
-        </p:txBody>
-      </p:sp>
-      <p:sp>
-        <p:nvSpPr>
-          <p:cNvPr id="27" name="Screenshot frame"/>
-          <p:cNvSpPr/>
-          <p:nvPr/>
-        </p:nvSpPr>
-        <p:spPr>
-          <a:xfrm>
-            <a:off x="7498080" y="1691640"/>
-            <a:ext cx="4142232" cy="3246120"/>
-          </a:xfrm>
-          <a:prstGeom prst="roundRect">
-            <a:avLst>
-              <a:gd name="adj" fmla="val 2254"/>
-            </a:avLst>
-          </a:prstGeom>
-          <a:solidFill>
-            <a:schemeClr val="bg2"/>
-          </a:solidFill>
-          <a:ln w="15875">
-            <a:solidFill>
-              <a:schemeClr val="accent5"/>
-            </a:solidFill>
-            <a:prstDash val="dash"/>
-          </a:ln>
-        </p:spPr>
-      </p:sp>
-      <p:sp>
-        <p:nvSpPr>
-          <p:cNvPr id="28" name="Shape 17"/>
-          <p:cNvSpPr/>
-          <p:nvPr/>
-        </p:nvSpPr>
-        <p:spPr>
-          <a:xfrm>
-            <a:off x="7626096" y="1819656"/>
-            <a:ext cx="365760" cy="365760"/>
-          </a:xfrm>
-          <a:prstGeom prst="ellipse">
-            <a:avLst/>
-          </a:prstGeom>
-          <a:solidFill>
-            <a:schemeClr val="accent5"/>
-          </a:solidFill>
-          <a:ln/>
-        </p:spPr>
+              <a:t>Preview isn’t locked — the changes are worked out again at apply time</a:t>
+            </a:r>
+            <a:endParaRPr lang="en-US" sz="1500" dirty="0"/>
+          </a:p>
+        </p:txBody>
       </p:sp>
       <p:pic>
         <p:nvPicPr>
-          <p:cNvPr id="29" name="Image 9" descr="preencoded.png">    </p:cNvPr>
+          <p:cNvPr id="27" name="Image 9" descr="preencoded.png">    </p:cNvPr>
           <p:cNvPicPr>
             <a:picLocks noChangeAspect="1"/>
           </p:cNvPicPr>
@@ -17651,8 +15787,8 @@
         </p:blipFill>
         <p:spPr>
           <a:xfrm>
-            <a:off x="7706563" y="1900123"/>
-            <a:ext cx="204826" cy="204826"/>
+            <a:off x="6473952" y="4564761"/>
+            <a:ext cx="219456" cy="219456"/>
           </a:xfrm>
           <a:prstGeom prst="rect">
             <a:avLst/>
@@ -17661,14 +15797,14 @@
       </p:pic>
       <p:sp>
         <p:nvSpPr>
-          <p:cNvPr id="30" name="Text 18"/>
+          <p:cNvPr id="28" name="Text 16"/>
           <p:cNvSpPr txBox="1"/>
           <p:nvPr/>
         </p:nvSpPr>
         <p:spPr>
           <a:xfrm>
-            <a:off x="7498080" y="5010912"/>
-            <a:ext cx="4142232" cy="548640"/>
+            <a:off x="6821424" y="4549140"/>
+            <a:ext cx="4590288" cy="519684"/>
           </a:xfrm>
           <a:prstGeom prst="rect">
             <a:avLst/>
@@ -17684,55 +15820,96 @@
               <a:buNone/>
             </a:pPr>
             <a:r>
-              <a:rPr lang="en-US" sz="1300" b="1" dirty="0">
+              <a:rPr lang="en-US" sz="1500" dirty="0">
                 <a:solidFill>
                   <a:schemeClr val="tx1"/>
                 </a:solidFill>
               </a:rPr>
-              <a:t>The missing approval gate</a:t>
-            </a:r>
-            <a:pPr indent="0" marL="0">
-              <a:buNone/>
-            </a:pPr>
-            <a:r>
-              <a:rPr lang="en-US" sz="1200" dirty="0">
-                <a:solidFill>
-                  <a:schemeClr val="tx2"/>
-                </a:solidFill>
-              </a:rPr>
-              <a:t>  ws2-dns-records-apply.yml, lines 418–444: described, but never added</a:t>
-            </a:r>
-            <a:endParaRPr lang="en-US" sz="1400" dirty="0"/>
-          </a:p>
-        </p:txBody>
-      </p:sp>
-      <p:sp>
-        <p:nvSpPr>
-          <p:cNvPr id="32" name="Text 1"/>
+              <a:t>Works outside CloudFormation — no change set or stack history</a:t>
+            </a:r>
+            <a:endParaRPr lang="en-US" sz="1500" dirty="0"/>
+          </a:p>
+        </p:txBody>
+      </p:sp>
+      <p:sp>
+        <p:nvSpPr>
+          <p:cNvPr id="29" name="Takeaway"/>
           <p:cNvSpPr/>
-          <p:nvPr>
-            <p:ph idx="103" hasCustomPrompt="1"/>
-          </p:nvPr>
-        </p:nvSpPr>
-        <p:spPr>
-          <a:xfrm>
-            <a:off x="7498080" y="1691640"/>
-            <a:ext cx="4142232" cy="3246120"/>
-          </a:xfrm>
-          <a:prstGeom prst="rect">
-            <a:avLst/>
-          </a:prstGeom>
-          <a:noFill/>
-          <a:ln/>
-        </p:spPr>
-        <p:txBody>
-          <a:bodyPr wrap="square" lIns="558800" tIns="50800" rIns="558800" bIns="50800" rtlCol="0" anchor="ctr"/>
-          <a:lstStyle/>
-          <a:p>
-            <a:pPr algn="ctr" indent="0" marL="0">
-              <a:buNone/>
-            </a:pPr>
-            <a:endParaRPr lang="en-US" sz="1200" dirty="0"/>
+          <p:nvPr/>
+        </p:nvSpPr>
+        <p:spPr>
+          <a:xfrm>
+            <a:off x="548640" y="5532120"/>
+            <a:ext cx="11091672" cy="640080"/>
+          </a:xfrm>
+          <a:prstGeom prst="roundRect">
+            <a:avLst>
+              <a:gd name="adj" fmla="val 17143"/>
+            </a:avLst>
+          </a:prstGeom>
+          <a:solidFill>
+            <a:schemeClr val="tx1"/>
+          </a:solidFill>
+          <a:ln/>
+        </p:spPr>
+      </p:sp>
+      <p:pic>
+        <p:nvPicPr>
+          <p:cNvPr id="30" name="Image 10" descr="preencoded.png">    </p:cNvPr>
+          <p:cNvPicPr>
+            <a:picLocks noChangeAspect="1"/>
+          </p:cNvPicPr>
+          <p:nvPr/>
+        </p:nvPicPr>
+        <p:blipFill>
+          <a:blip r:embed="rId11"/>
+          <a:stretch>
+            <a:fillRect/>
+          </a:stretch>
+        </p:blipFill>
+        <p:spPr>
+          <a:xfrm>
+            <a:off x="804672" y="5687568"/>
+            <a:ext cx="329184" cy="329184"/>
+          </a:xfrm>
+          <a:prstGeom prst="rect">
+            <a:avLst/>
+          </a:prstGeom>
+        </p:spPr>
+      </p:pic>
+      <p:sp>
+        <p:nvSpPr>
+          <p:cNvPr id="31" name="Text 18"/>
+          <p:cNvSpPr txBox="1"/>
+          <p:nvPr/>
+        </p:nvSpPr>
+        <p:spPr>
+          <a:xfrm>
+            <a:off x="1298448" y="5532120"/>
+            <a:ext cx="10058400" cy="640080"/>
+          </a:xfrm>
+          <a:prstGeom prst="rect">
+            <a:avLst/>
+          </a:prstGeom>
+          <a:noFill/>
+          <a:ln/>
+        </p:spPr>
+        <p:txBody>
+          <a:bodyPr wrap="square" lIns="0" tIns="0" rIns="0" bIns="0" rtlCol="0" anchor="ctr"/>
+          <a:lstStyle/>
+          <a:p>
+            <a:pPr indent="0" marL="0">
+              <a:buNone/>
+            </a:pPr>
+            <a:r>
+              <a:rPr lang="en-US" sz="1700" b="1" dirty="0">
+                <a:solidFill>
+                  <a:schemeClr val="bg1"/>
+                </a:solidFill>
+              </a:rPr>
+              <a:t>Strong for bulk edits — but no manual-change alarm, no locked change set, and no alias records.</a:t>
+            </a:r>
+            <a:endParaRPr lang="en-US" sz="1700" dirty="0"/>
           </a:p>
         </p:txBody>
       </p:sp>
@@ -18732,13 +16909,13 @@
                       <a:r>
                         <a:rPr lang="en-US" sz="1400" b="1" dirty="0">
                           <a:solidFill>
-                            <a:schemeClr val="accent3"/>
+                            <a:schemeClr val="accent1"/>
                           </a:solidFill>
                           <a:latin typeface="Segoe UI Symbol" pitchFamily="34" charset="0"/>
                           <a:ea typeface="Segoe UI Symbol" pitchFamily="34" charset="-122"/>
                           <a:cs typeface="Segoe UI Symbol" pitchFamily="34" charset="-120"/>
                         </a:rPr>
-                        <a:t>✗  </a:t>
+                        <a:t>✓  </a:t>
                       </a:r>
                       <a:pPr indent="0" marL="0">
                         <a:buNone/>
@@ -18749,7 +16926,7 @@
                             <a:schemeClr val="tx1"/>
                           </a:solidFill>
                         </a:rPr>
-                        <a:t>Promised in the file, but the job is missing</a:t>
+                        <a:t>Gatekeeper approval outside sandbox</a:t>
                       </a:r>
                       <a:endParaRPr lang="en-US" sz="1400" dirty="0"/>
                     </a:p>
@@ -20056,12 +18233,12 @@
         </p:nvSpPr>
         <p:spPr>
           <a:xfrm>
-            <a:off x="548640" y="1691640"/>
-            <a:ext cx="3639312" cy="3474720"/>
+            <a:off x="548640" y="1645920"/>
+            <a:ext cx="5440680" cy="2331720"/>
           </a:xfrm>
           <a:prstGeom prst="roundRect">
             <a:avLst>
-              <a:gd name="adj" fmla="val 3158"/>
+              <a:gd name="adj" fmla="val 4706"/>
             </a:avLst>
           </a:prstGeom>
           <a:solidFill>
@@ -20080,8 +18257,8 @@
         </p:nvSpPr>
         <p:spPr>
           <a:xfrm>
-            <a:off x="749808" y="1874520"/>
-            <a:ext cx="502920" cy="502920"/>
+            <a:off x="749808" y="1810512"/>
+            <a:ext cx="457200" cy="457200"/>
           </a:xfrm>
           <a:prstGeom prst="ellipse">
             <a:avLst/>
@@ -20108,8 +18285,8 @@
         </p:blipFill>
         <p:spPr>
           <a:xfrm>
-            <a:off x="860450" y="1985162"/>
-            <a:ext cx="281635" cy="281635"/>
+            <a:off x="850392" y="1911096"/>
+            <a:ext cx="256032" cy="256032"/>
           </a:xfrm>
           <a:prstGeom prst="rect">
             <a:avLst/>
@@ -20124,8 +18301,8 @@
         </p:nvSpPr>
         <p:spPr>
           <a:xfrm>
-            <a:off x="1389888" y="1865376"/>
-            <a:ext cx="2651760" cy="219456"/>
+            <a:off x="1353312" y="1783080"/>
+            <a:ext cx="4389120" cy="219456"/>
           </a:xfrm>
           <a:prstGeom prst="rect">
             <a:avLst/>
@@ -20160,8 +18337,8 @@
         </p:nvSpPr>
         <p:spPr>
           <a:xfrm>
-            <a:off x="1389888" y="2075688"/>
-            <a:ext cx="2697480" cy="365760"/>
+            <a:off x="1353312" y="1984248"/>
+            <a:ext cx="4389120" cy="329184"/>
           </a:xfrm>
           <a:prstGeom prst="rect">
             <a:avLst/>
@@ -20177,14 +18354,14 @@
               <a:buNone/>
             </a:pPr>
             <a:r>
-              <a:rPr lang="en-US" sz="2000" b="1" dirty="0">
+              <a:rPr lang="en-US" sz="1900" b="1" dirty="0">
                 <a:solidFill>
                   <a:schemeClr val="tx1"/>
                 </a:solidFill>
               </a:rPr>
               <a:t>A partial snapshot</a:t>
             </a:r>
-            <a:endParaRPr lang="en-US" sz="2000" dirty="0"/>
+            <a:endParaRPr lang="en-US" sz="1900" dirty="0"/>
           </a:p>
         </p:txBody>
       </p:sp>
@@ -20204,7 +18381,7 @@
         </p:blipFill>
         <p:spPr>
           <a:xfrm>
-            <a:off x="777240" y="2705354"/>
+            <a:off x="777240" y="2495042"/>
             <a:ext cx="219456" cy="219456"/>
           </a:xfrm>
           <a:prstGeom prst="rect">
@@ -20220,8 +18397,8 @@
         </p:nvSpPr>
         <p:spPr>
           <a:xfrm>
-            <a:off x="1124712" y="2697480"/>
-            <a:ext cx="2898648" cy="271780"/>
+            <a:off x="1124712" y="2487168"/>
+            <a:ext cx="4681728" cy="271780"/>
           </a:xfrm>
           <a:prstGeom prst="rect">
             <a:avLst/>
@@ -20264,7 +18441,7 @@
         </p:blipFill>
         <p:spPr>
           <a:xfrm>
-            <a:off x="777240" y="3068574"/>
+            <a:off x="777240" y="2830830"/>
             <a:ext cx="219456" cy="219456"/>
           </a:xfrm>
           <a:prstGeom prst="rect">
@@ -20280,8 +18457,8 @@
         </p:nvSpPr>
         <p:spPr>
           <a:xfrm>
-            <a:off x="1124712" y="3060700"/>
-            <a:ext cx="2898648" cy="488696"/>
+            <a:off x="1124712" y="2822956"/>
+            <a:ext cx="4681728" cy="271780"/>
           </a:xfrm>
           <a:prstGeom prst="rect">
             <a:avLst/>
@@ -20324,7 +18501,7 @@
         </p:blipFill>
         <p:spPr>
           <a:xfrm>
-            <a:off x="777240" y="3648710"/>
+            <a:off x="777240" y="3166618"/>
             <a:ext cx="219456" cy="219456"/>
           </a:xfrm>
           <a:prstGeom prst="rect">
@@ -20340,8 +18517,8 @@
         </p:nvSpPr>
         <p:spPr>
           <a:xfrm>
-            <a:off x="1124712" y="3640836"/>
-            <a:ext cx="2898648" cy="488696"/>
+            <a:off x="1124712" y="3158744"/>
+            <a:ext cx="4681728" cy="271780"/>
           </a:xfrm>
           <a:prstGeom prst="rect">
             <a:avLst/>
@@ -20384,7 +18561,7 @@
         </p:blipFill>
         <p:spPr>
           <a:xfrm>
-            <a:off x="777240" y="4228846"/>
+            <a:off x="777240" y="3502406"/>
             <a:ext cx="219456" cy="219456"/>
           </a:xfrm>
           <a:prstGeom prst="rect">
@@ -20400,8 +18577,8 @@
         </p:nvSpPr>
         <p:spPr>
           <a:xfrm>
-            <a:off x="1124712" y="4220972"/>
-            <a:ext cx="2898648" cy="705612"/>
+            <a:off x="1124712" y="3494532"/>
+            <a:ext cx="4681728" cy="271780"/>
           </a:xfrm>
           <a:prstGeom prst="rect">
             <a:avLst/>
@@ -20422,7 +18599,7 @@
                   <a:schemeClr val="tx1"/>
                 </a:solidFill>
               </a:rPr>
-              <a:t>Undo = re-apply old files; removals need ‘deletes’ ticked, and there’s no approval gate</a:t>
+              <a:t>Undo = re-apply old files; removals need ‘deletes’ ticked</a:t>
             </a:r>
             <a:endParaRPr lang="en-US" sz="1400" dirty="0"/>
           </a:p>
@@ -20436,12 +18613,12 @@
         </p:nvSpPr>
         <p:spPr>
           <a:xfrm>
-            <a:off x="4370832" y="1691640"/>
-            <a:ext cx="3639312" cy="3474720"/>
+            <a:off x="6199632" y="1645920"/>
+            <a:ext cx="5440680" cy="2331720"/>
           </a:xfrm>
           <a:prstGeom prst="roundRect">
             <a:avLst>
-              <a:gd name="adj" fmla="val 3158"/>
+              <a:gd name="adj" fmla="val 4706"/>
             </a:avLst>
           </a:prstGeom>
           <a:solidFill>
@@ -20460,8 +18637,8 @@
         </p:nvSpPr>
         <p:spPr>
           <a:xfrm>
-            <a:off x="4572000" y="1874520"/>
-            <a:ext cx="502920" cy="502920"/>
+            <a:off x="6400800" y="1810512"/>
+            <a:ext cx="457200" cy="457200"/>
           </a:xfrm>
           <a:prstGeom prst="ellipse">
             <a:avLst/>
@@ -20488,8 +18665,8 @@
         </p:blipFill>
         <p:spPr>
           <a:xfrm>
-            <a:off x="4682642" y="1985162"/>
-            <a:ext cx="281635" cy="281635"/>
+            <a:off x="6501384" y="1911096"/>
+            <a:ext cx="256032" cy="256032"/>
           </a:xfrm>
           <a:prstGeom prst="rect">
             <a:avLst/>
@@ -20504,8 +18681,8 @@
         </p:nvSpPr>
         <p:spPr>
           <a:xfrm>
-            <a:off x="5212080" y="1865376"/>
-            <a:ext cx="2651760" cy="219456"/>
+            <a:off x="7004304" y="1783080"/>
+            <a:ext cx="4389120" cy="219456"/>
           </a:xfrm>
           <a:prstGeom prst="rect">
             <a:avLst/>
@@ -20540,8 +18717,8 @@
         </p:nvSpPr>
         <p:spPr>
           <a:xfrm>
-            <a:off x="5212080" y="2075688"/>
-            <a:ext cx="2697480" cy="365760"/>
+            <a:off x="7004304" y="1984248"/>
+            <a:ext cx="4389120" cy="329184"/>
           </a:xfrm>
           <a:prstGeom prst="rect">
             <a:avLst/>
@@ -20557,14 +18734,14 @@
               <a:buNone/>
             </a:pPr>
             <a:r>
-              <a:rPr lang="en-US" sz="2000" b="1" dirty="0">
+              <a:rPr lang="en-US" sz="1900" b="1" dirty="0">
                 <a:solidFill>
                   <a:schemeClr val="tx1"/>
                 </a:solidFill>
               </a:rPr>
               <a:t>The real templates</a:t>
             </a:r>
-            <a:endParaRPr lang="en-US" sz="2000" dirty="0"/>
+            <a:endParaRPr lang="en-US" sz="1900" dirty="0"/>
           </a:p>
         </p:txBody>
       </p:sp>
@@ -20584,7 +18761,7 @@
         </p:blipFill>
         <p:spPr>
           <a:xfrm>
-            <a:off x="4599432" y="2705354"/>
+            <a:off x="6428232" y="2495042"/>
             <a:ext cx="219456" cy="219456"/>
           </a:xfrm>
           <a:prstGeom prst="rect">
@@ -20600,8 +18777,8 @@
         </p:nvSpPr>
         <p:spPr>
           <a:xfrm>
-            <a:off x="4946904" y="2697480"/>
-            <a:ext cx="2898648" cy="488696"/>
+            <a:off x="6775704" y="2487168"/>
+            <a:ext cx="4681728" cy="271780"/>
           </a:xfrm>
           <a:prstGeom prst="rect">
             <a:avLst/>
@@ -20644,7 +18821,7 @@
         </p:blipFill>
         <p:spPr>
           <a:xfrm>
-            <a:off x="4599432" y="3285490"/>
+            <a:off x="6428232" y="2830830"/>
             <a:ext cx="219456" cy="219456"/>
           </a:xfrm>
           <a:prstGeom prst="rect">
@@ -20660,8 +18837,8 @@
         </p:nvSpPr>
         <p:spPr>
           <a:xfrm>
-            <a:off x="4946904" y="3277616"/>
-            <a:ext cx="2898648" cy="488696"/>
+            <a:off x="6775704" y="2822956"/>
+            <a:ext cx="4681728" cy="271780"/>
           </a:xfrm>
           <a:prstGeom prst="rect">
             <a:avLst/>
@@ -20704,7 +18881,7 @@
         </p:blipFill>
         <p:spPr>
           <a:xfrm>
-            <a:off x="4599432" y="3865626"/>
+            <a:off x="6428232" y="3166618"/>
             <a:ext cx="219456" cy="219456"/>
           </a:xfrm>
           <a:prstGeom prst="rect">
@@ -20720,8 +18897,8 @@
         </p:nvSpPr>
         <p:spPr>
           <a:xfrm>
-            <a:off x="4946904" y="3857752"/>
-            <a:ext cx="2898648" cy="488696"/>
+            <a:off x="6775704" y="3158744"/>
+            <a:ext cx="4681728" cy="271780"/>
           </a:xfrm>
           <a:prstGeom prst="rect">
             <a:avLst/>
@@ -20764,7 +18941,7 @@
         </p:blipFill>
         <p:spPr>
           <a:xfrm>
-            <a:off x="4599432" y="4445762"/>
+            <a:off x="6428232" y="3502406"/>
             <a:ext cx="219456" cy="219456"/>
           </a:xfrm>
           <a:prstGeom prst="rect">
@@ -20780,8 +18957,8 @@
         </p:nvSpPr>
         <p:spPr>
           <a:xfrm>
-            <a:off x="4946904" y="4437888"/>
-            <a:ext cx="2898648" cy="271780"/>
+            <a:off x="6775704" y="3494532"/>
+            <a:ext cx="4681728" cy="271780"/>
           </a:xfrm>
           <a:prstGeom prst="rect">
             <a:avLst/>
@@ -20810,29 +18987,54 @@
       </p:sp>
       <p:sp>
         <p:nvSpPr>
-          <p:cNvPr id="30" name="Takeaway"/>
+          <p:cNvPr id="30" name="Screenshot panel"/>
           <p:cNvSpPr/>
           <p:nvPr/>
         </p:nvSpPr>
         <p:spPr>
           <a:xfrm>
-            <a:off x="548640" y="5349240"/>
-            <a:ext cx="7461504" cy="548640"/>
+            <a:off x="548640" y="4160520"/>
+            <a:ext cx="6949440" cy="1783080"/>
           </a:xfrm>
           <a:prstGeom prst="roundRect">
             <a:avLst>
-              <a:gd name="adj" fmla="val 20000"/>
+              <a:gd name="adj" fmla="val 4103"/>
             </a:avLst>
           </a:prstGeom>
           <a:solidFill>
-            <a:schemeClr val="tx1"/>
+            <a:schemeClr val="bg2"/>
           </a:solidFill>
           <a:ln/>
+        </p:spPr>
+      </p:sp>
+      <p:sp>
+        <p:nvSpPr>
+          <p:cNvPr id="31" name="Screenshot border"/>
+          <p:cNvSpPr/>
+          <p:nvPr/>
+        </p:nvSpPr>
+        <p:spPr>
+          <a:xfrm>
+            <a:off x="1310316" y="4251960"/>
+            <a:ext cx="5426089" cy="1600200"/>
+          </a:xfrm>
+          <a:prstGeom prst="rect">
+            <a:avLst/>
+          </a:prstGeom>
+          <a:solidFill>
+            <a:schemeClr val="bg1"/>
+          </a:solidFill>
+          <a:ln w="9525">
+            <a:solidFill>
+              <a:srgbClr val="C9D1DB"/>
+            </a:solidFill>
+            <a:prstDash val="solid"/>
+          </a:ln>
         </p:spPr>
       </p:sp>
       <p:pic>
         <p:nvPicPr>
-          <p:cNvPr id="31" name="Image 10" descr="preencoded.png">    </p:cNvPr>
+          <p:cNvPr id="32" name="Image 10" descr="Git history of a DNS template">    </p:cNvPr>
           <p:cNvPicPr>
             <a:picLocks noChangeAspect="1"/>
           </p:cNvPicPr>
@@ -20846,50 +19048,14 @@
         </p:blipFill>
         <p:spPr>
           <a:xfrm>
-            <a:off x="768096" y="5486400"/>
-            <a:ext cx="274320" cy="274320"/>
+            <a:off x="1328604" y="4270248"/>
+            <a:ext cx="5389513" cy="1563624"/>
           </a:xfrm>
           <a:prstGeom prst="rect">
             <a:avLst/>
           </a:prstGeom>
         </p:spPr>
       </p:pic>
-      <p:sp>
-        <p:nvSpPr>
-          <p:cNvPr id="32" name="Text 19"/>
-          <p:cNvSpPr txBox="1"/>
-          <p:nvPr/>
-        </p:nvSpPr>
-        <p:spPr>
-          <a:xfrm>
-            <a:off x="1188720" y="5349240"/>
-            <a:ext cx="6720840" cy="548640"/>
-          </a:xfrm>
-          <a:prstGeom prst="rect">
-            <a:avLst/>
-          </a:prstGeom>
-          <a:noFill/>
-          <a:ln/>
-        </p:spPr>
-        <p:txBody>
-          <a:bodyPr wrap="square" lIns="0" tIns="0" rIns="0" bIns="0" rtlCol="0" anchor="ctr"/>
-          <a:lstStyle/>
-          <a:p>
-            <a:pPr indent="0" marL="0">
-              <a:buNone/>
-            </a:pPr>
-            <a:r>
-              <a:rPr lang="en-US" sz="1600" b="1" dirty="0">
-                <a:solidFill>
-                  <a:schemeClr val="bg1"/>
-                </a:solidFill>
-              </a:rPr>
-              <a:t>In a DNS incident: see what changed, and undo it in one reviewed step.</a:t>
-            </a:r>
-            <a:endParaRPr lang="en-US" sz="1600" dirty="0"/>
-          </a:p>
-        </p:txBody>
-      </p:sp>
       <p:sp>
         <p:nvSpPr>
           <p:cNvPr id="33" name="Text 20"/>
@@ -20898,8 +19064,8 @@
         </p:nvSpPr>
         <p:spPr>
           <a:xfrm>
-            <a:off x="548640" y="5989320"/>
-            <a:ext cx="7461504" cy="384048"/>
+            <a:off x="548640" y="6016752"/>
+            <a:ext cx="6949440" cy="320040"/>
           </a:xfrm>
           <a:prstGeom prst="rect">
             <a:avLst/>
@@ -20915,67 +19081,53 @@
               <a:buNone/>
             </a:pPr>
             <a:r>
-              <a:rPr lang="en-US" sz="1100" dirty="0">
+              <a:rPr lang="en-US" sz="1300" b="1" dirty="0">
+                <a:solidFill>
+                  <a:schemeClr val="tx1"/>
+                </a:solidFill>
+              </a:rPr>
+              <a:t>Git history of a DNS template</a:t>
+            </a:r>
+            <a:pPr indent="0" marL="0">
+              <a:buNone/>
+            </a:pPr>
+            <a:r>
+              <a:rPr lang="en-US" sz="1200" dirty="0">
                 <a:solidFill>
                   <a:schemeClr val="tx2"/>
                 </a:solidFill>
               </a:rPr>
-              <a:t>Git only knows about changes made through the pipeline — hand edits in the AWS console never reach it, so DNS changes should go through the pipeline only.</a:t>
-            </a:r>
-            <a:endParaRPr lang="en-US" sz="1100" dirty="0"/>
-          </a:p>
-        </p:txBody>
-      </p:sp>
-      <p:sp>
-        <p:nvSpPr>
-          <p:cNvPr id="34" name="Screenshot frame"/>
+              <a:t>  every change with who, when and its Pull Request</a:t>
+            </a:r>
+            <a:endParaRPr lang="en-US" sz="1400" dirty="0"/>
+          </a:p>
+        </p:txBody>
+      </p:sp>
+      <p:sp>
+        <p:nvSpPr>
+          <p:cNvPr id="34" name="Takeaway"/>
           <p:cNvSpPr/>
           <p:nvPr/>
         </p:nvSpPr>
         <p:spPr>
           <a:xfrm>
-            <a:off x="8275320" y="1691640"/>
-            <a:ext cx="3364992" cy="3566160"/>
+            <a:off x="7726680" y="4160520"/>
+            <a:ext cx="3913632" cy="1097280"/>
           </a:xfrm>
           <a:prstGeom prst="roundRect">
             <a:avLst>
-              <a:gd name="adj" fmla="val 2174"/>
+              <a:gd name="adj" fmla="val 10000"/>
             </a:avLst>
           </a:prstGeom>
           <a:solidFill>
-            <a:schemeClr val="bg2"/>
-          </a:solidFill>
-          <a:ln w="15875">
-            <a:solidFill>
-              <a:schemeClr val="accent5"/>
-            </a:solidFill>
-            <a:prstDash val="dash"/>
-          </a:ln>
-        </p:spPr>
-      </p:sp>
-      <p:sp>
-        <p:nvSpPr>
-          <p:cNvPr id="35" name="Shape 22"/>
-          <p:cNvSpPr/>
-          <p:nvPr/>
-        </p:nvSpPr>
-        <p:spPr>
-          <a:xfrm>
-            <a:off x="8403336" y="1819656"/>
-            <a:ext cx="365760" cy="365760"/>
-          </a:xfrm>
-          <a:prstGeom prst="ellipse">
-            <a:avLst/>
-          </a:prstGeom>
-          <a:solidFill>
-            <a:schemeClr val="accent5"/>
+            <a:schemeClr val="tx1"/>
           </a:solidFill>
           <a:ln/>
         </p:spPr>
       </p:sp>
       <p:pic>
         <p:nvPicPr>
-          <p:cNvPr id="36" name="Image 11" descr="preencoded.png">    </p:cNvPr>
+          <p:cNvPr id="35" name="Image 11" descr="preencoded.png">    </p:cNvPr>
           <p:cNvPicPr>
             <a:picLocks noChangeAspect="1"/>
           </p:cNvPicPr>
@@ -20989,14 +19141,50 @@
         </p:blipFill>
         <p:spPr>
           <a:xfrm>
-            <a:off x="8483803" y="1900123"/>
-            <a:ext cx="204826" cy="204826"/>
+            <a:off x="7936992" y="4553712"/>
+            <a:ext cx="310896" cy="310896"/>
           </a:xfrm>
           <a:prstGeom prst="rect">
             <a:avLst/>
           </a:prstGeom>
         </p:spPr>
       </p:pic>
+      <p:sp>
+        <p:nvSpPr>
+          <p:cNvPr id="36" name="Text 22"/>
+          <p:cNvSpPr txBox="1"/>
+          <p:nvPr/>
+        </p:nvSpPr>
+        <p:spPr>
+          <a:xfrm>
+            <a:off x="8394192" y="4160520"/>
+            <a:ext cx="3108960" cy="1097280"/>
+          </a:xfrm>
+          <a:prstGeom prst="rect">
+            <a:avLst/>
+          </a:prstGeom>
+          <a:noFill/>
+          <a:ln/>
+        </p:spPr>
+        <p:txBody>
+          <a:bodyPr wrap="square" lIns="0" tIns="0" rIns="0" bIns="0" rtlCol="0" anchor="ctr"/>
+          <a:lstStyle/>
+          <a:p>
+            <a:pPr indent="0" marL="0">
+              <a:buNone/>
+            </a:pPr>
+            <a:r>
+              <a:rPr lang="en-US" sz="1600" b="1" dirty="0">
+                <a:solidFill>
+                  <a:schemeClr val="bg1"/>
+                </a:solidFill>
+              </a:rPr>
+              <a:t>In a DNS incident: see what changed, and undo it in one reviewed step.</a:t>
+            </a:r>
+            <a:endParaRPr lang="en-US" sz="1600" dirty="0"/>
+          </a:p>
+        </p:txBody>
+      </p:sp>
       <p:sp>
         <p:nvSpPr>
           <p:cNvPr id="37" name="Text 23"/>
@@ -21005,8 +19193,8 @@
         </p:nvSpPr>
         <p:spPr>
           <a:xfrm>
-            <a:off x="8275320" y="5330952"/>
-            <a:ext cx="3364992" cy="548640"/>
+            <a:off x="7726680" y="5413248"/>
+            <a:ext cx="3913632" cy="868680"/>
           </a:xfrm>
           <a:prstGeom prst="rect">
             <a:avLst/>
@@ -21022,55 +19210,14 @@
               <a:buNone/>
             </a:pPr>
             <a:r>
-              <a:rPr lang="en-US" sz="1300" b="1" dirty="0">
-                <a:solidFill>
-                  <a:schemeClr val="tx1"/>
-                </a:solidFill>
-              </a:rPr>
-              <a:t>Git history of a DNS template</a:t>
-            </a:r>
-            <a:pPr indent="0" marL="0">
-              <a:buNone/>
-            </a:pPr>
-            <a:r>
-              <a:rPr lang="en-US" sz="1200" dirty="0">
+              <a:rPr lang="en-US" sz="1150" dirty="0">
                 <a:solidFill>
                   <a:schemeClr val="tx2"/>
                 </a:solidFill>
               </a:rPr>
-              <a:t>  every record change: what, who and when</a:t>
-            </a:r>
-            <a:endParaRPr lang="en-US" sz="1400" dirty="0"/>
-          </a:p>
-        </p:txBody>
-      </p:sp>
-      <p:sp>
-        <p:nvSpPr>
-          <p:cNvPr id="39" name="Text 1"/>
-          <p:cNvSpPr/>
-          <p:nvPr>
-            <p:ph idx="103" hasCustomPrompt="1"/>
-          </p:nvPr>
-        </p:nvSpPr>
-        <p:spPr>
-          <a:xfrm>
-            <a:off x="8275320" y="1691640"/>
-            <a:ext cx="3364992" cy="3566160"/>
-          </a:xfrm>
-          <a:prstGeom prst="rect">
-            <a:avLst/>
-          </a:prstGeom>
-          <a:noFill/>
-          <a:ln/>
-        </p:spPr>
-        <p:txBody>
-          <a:bodyPr wrap="square" lIns="558800" tIns="50800" rIns="558800" bIns="50800" rtlCol="0" anchor="ctr"/>
-          <a:lstStyle/>
-          <a:p>
-            <a:pPr algn="ctr" indent="0" marL="0">
-              <a:buNone/>
-            </a:pPr>
-            <a:endParaRPr lang="en-US" sz="1200" dirty="0"/>
+              <a:t>Git only knows about changes made through the pipeline — hand edits in the AWS console never reach it, so DNS changes should go through the pipeline only.</a:t>
+            </a:r>
+            <a:endParaRPr lang="en-US" sz="1150" dirty="0"/>
           </a:p>
         </p:txBody>
       </p:sp>
